--- a/stim/Presentation1.pptx
+++ b/stim/Presentation1.pptx
@@ -15,8 +15,11 @@
     <p:sldId id="366" r:id="rId9"/>
     <p:sldId id="367" r:id="rId10"/>
     <p:sldId id="368" r:id="rId11"/>
-    <p:sldId id="371" r:id="rId12"/>
-    <p:sldId id="369" r:id="rId13"/>
+    <p:sldId id="372" r:id="rId12"/>
+    <p:sldId id="373" r:id="rId13"/>
+    <p:sldId id="371" r:id="rId14"/>
+    <p:sldId id="369" r:id="rId15"/>
+    <p:sldId id="374" r:id="rId16"/>
   </p:sldIdLst>
   <p:sldSz cx="12192000" cy="6858000"/>
   <p:notesSz cx="6858000" cy="9144000"/>
@@ -270,7 +273,7 @@
           <a:p>
             <a:fld id="{CB6AC1C1-8471-8848-B888-E64593EA49E8}" type="datetimeFigureOut">
               <a:rPr lang="en-US" smtClean="0"/>
-              <a:t>10/2/25</a:t>
+              <a:t>10/16/25</a:t>
             </a:fld>
             <a:endParaRPr lang="en-US"/>
           </a:p>
@@ -468,7 +471,7 @@
           <a:p>
             <a:fld id="{CB6AC1C1-8471-8848-B888-E64593EA49E8}" type="datetimeFigureOut">
               <a:rPr lang="en-US" smtClean="0"/>
-              <a:t>10/2/25</a:t>
+              <a:t>10/16/25</a:t>
             </a:fld>
             <a:endParaRPr lang="en-US"/>
           </a:p>
@@ -676,7 +679,7 @@
           <a:p>
             <a:fld id="{CB6AC1C1-8471-8848-B888-E64593EA49E8}" type="datetimeFigureOut">
               <a:rPr lang="en-US" smtClean="0"/>
-              <a:t>10/2/25</a:t>
+              <a:t>10/16/25</a:t>
             </a:fld>
             <a:endParaRPr lang="en-US"/>
           </a:p>
@@ -874,7 +877,7 @@
           <a:p>
             <a:fld id="{CB6AC1C1-8471-8848-B888-E64593EA49E8}" type="datetimeFigureOut">
               <a:rPr lang="en-US" smtClean="0"/>
-              <a:t>10/2/25</a:t>
+              <a:t>10/16/25</a:t>
             </a:fld>
             <a:endParaRPr lang="en-US"/>
           </a:p>
@@ -1149,7 +1152,7 @@
           <a:p>
             <a:fld id="{CB6AC1C1-8471-8848-B888-E64593EA49E8}" type="datetimeFigureOut">
               <a:rPr lang="en-US" smtClean="0"/>
-              <a:t>10/2/25</a:t>
+              <a:t>10/16/25</a:t>
             </a:fld>
             <a:endParaRPr lang="en-US"/>
           </a:p>
@@ -1414,7 +1417,7 @@
           <a:p>
             <a:fld id="{CB6AC1C1-8471-8848-B888-E64593EA49E8}" type="datetimeFigureOut">
               <a:rPr lang="en-US" smtClean="0"/>
-              <a:t>10/2/25</a:t>
+              <a:t>10/16/25</a:t>
             </a:fld>
             <a:endParaRPr lang="en-US"/>
           </a:p>
@@ -1826,7 +1829,7 @@
           <a:p>
             <a:fld id="{CB6AC1C1-8471-8848-B888-E64593EA49E8}" type="datetimeFigureOut">
               <a:rPr lang="en-US" smtClean="0"/>
-              <a:t>10/2/25</a:t>
+              <a:t>10/16/25</a:t>
             </a:fld>
             <a:endParaRPr lang="en-US"/>
           </a:p>
@@ -1967,7 +1970,7 @@
           <a:p>
             <a:fld id="{CB6AC1C1-8471-8848-B888-E64593EA49E8}" type="datetimeFigureOut">
               <a:rPr lang="en-US" smtClean="0"/>
-              <a:t>10/2/25</a:t>
+              <a:t>10/16/25</a:t>
             </a:fld>
             <a:endParaRPr lang="en-US"/>
           </a:p>
@@ -2080,7 +2083,7 @@
           <a:p>
             <a:fld id="{CB6AC1C1-8471-8848-B888-E64593EA49E8}" type="datetimeFigureOut">
               <a:rPr lang="en-US" smtClean="0"/>
-              <a:t>10/2/25</a:t>
+              <a:t>10/16/25</a:t>
             </a:fld>
             <a:endParaRPr lang="en-US"/>
           </a:p>
@@ -2391,7 +2394,7 @@
           <a:p>
             <a:fld id="{CB6AC1C1-8471-8848-B888-E64593EA49E8}" type="datetimeFigureOut">
               <a:rPr lang="en-US" smtClean="0"/>
-              <a:t>10/2/25</a:t>
+              <a:t>10/16/25</a:t>
             </a:fld>
             <a:endParaRPr lang="en-US"/>
           </a:p>
@@ -2679,7 +2682,7 @@
           <a:p>
             <a:fld id="{CB6AC1C1-8471-8848-B888-E64593EA49E8}" type="datetimeFigureOut">
               <a:rPr lang="en-US" smtClean="0"/>
-              <a:t>10/2/25</a:t>
+              <a:t>10/16/25</a:t>
             </a:fld>
             <a:endParaRPr lang="en-US"/>
           </a:p>
@@ -2920,7 +2923,7 @@
           <a:p>
             <a:fld id="{CB6AC1C1-8471-8848-B888-E64593EA49E8}" type="datetimeFigureOut">
               <a:rPr lang="en-US" smtClean="0"/>
-              <a:t>10/2/25</a:t>
+              <a:t>10/16/25</a:t>
             </a:fld>
             <a:endParaRPr lang="en-US"/>
           </a:p>
@@ -5110,6 +5113,3217 @@
         <p:cNvPr id="1" name="">
           <a:extLst>
             <a:ext uri="{FF2B5EF4-FFF2-40B4-BE49-F238E27FC236}">
+              <a16:creationId xmlns:a16="http://schemas.microsoft.com/office/drawing/2014/main" id="{B0CF4694-E74B-7096-224C-65A6A285905F}"/>
+            </a:ext>
+          </a:extLst>
+        </p:cNvPr>
+        <p:cNvGrpSpPr/>
+        <p:nvPr/>
+      </p:nvGrpSpPr>
+      <p:grpSpPr>
+        <a:xfrm>
+          <a:off x="0" y="0"/>
+          <a:ext cx="0" cy="0"/>
+          <a:chOff x="0" y="0"/>
+          <a:chExt cx="0" cy="0"/>
+        </a:xfrm>
+      </p:grpSpPr>
+      <p:grpSp>
+        <p:nvGrpSpPr>
+          <p:cNvPr id="54" name="Group 53">
+            <a:extLst>
+              <a:ext uri="{FF2B5EF4-FFF2-40B4-BE49-F238E27FC236}">
+                <a16:creationId xmlns:a16="http://schemas.microsoft.com/office/drawing/2014/main" id="{C69030C1-2788-E694-6BD2-37133AD419D4}"/>
+              </a:ext>
+            </a:extLst>
+          </p:cNvPr>
+          <p:cNvGrpSpPr/>
+          <p:nvPr/>
+        </p:nvGrpSpPr>
+        <p:grpSpPr>
+          <a:xfrm>
+            <a:off x="1088970" y="47704"/>
+            <a:ext cx="9895047" cy="6739103"/>
+            <a:chOff x="1088970" y="47704"/>
+            <a:chExt cx="9895047" cy="6739103"/>
+          </a:xfrm>
+        </p:grpSpPr>
+        <p:pic>
+          <p:nvPicPr>
+            <p:cNvPr id="2" name="Picture 1" descr="A white rectangular object with a black border&#10;&#10;Description automatically generated">
+              <a:extLst>
+                <a:ext uri="{FF2B5EF4-FFF2-40B4-BE49-F238E27FC236}">
+                  <a16:creationId xmlns:a16="http://schemas.microsoft.com/office/drawing/2014/main" id="{27BD432E-FB01-3E14-1700-E2E993F5A47B}"/>
+                </a:ext>
+              </a:extLst>
+            </p:cNvPr>
+            <p:cNvPicPr>
+              <a:picLocks noChangeAspect="1"/>
+            </p:cNvPicPr>
+            <p:nvPr/>
+          </p:nvPicPr>
+          <p:blipFill>
+            <a:blip r:embed="rId2"/>
+            <a:stretch>
+              <a:fillRect/>
+            </a:stretch>
+          </p:blipFill>
+          <p:spPr>
+            <a:xfrm>
+              <a:off x="2084693" y="47704"/>
+              <a:ext cx="974922" cy="1371600"/>
+            </a:xfrm>
+            <a:prstGeom prst="rect">
+              <a:avLst/>
+            </a:prstGeom>
+          </p:spPr>
+        </p:pic>
+        <p:pic>
+          <p:nvPicPr>
+            <p:cNvPr id="4" name="Picture 3" descr="A white rectangular object with a black border&#10;&#10;Description automatically generated">
+              <a:extLst>
+                <a:ext uri="{FF2B5EF4-FFF2-40B4-BE49-F238E27FC236}">
+                  <a16:creationId xmlns:a16="http://schemas.microsoft.com/office/drawing/2014/main" id="{D4511076-8ED5-798B-83E6-62B933F8503B}"/>
+                </a:ext>
+              </a:extLst>
+            </p:cNvPr>
+            <p:cNvPicPr>
+              <a:picLocks noChangeAspect="1"/>
+            </p:cNvPicPr>
+            <p:nvPr/>
+          </p:nvPicPr>
+          <p:blipFill>
+            <a:blip r:embed="rId2"/>
+            <a:stretch>
+              <a:fillRect/>
+            </a:stretch>
+          </p:blipFill>
+          <p:spPr>
+            <a:xfrm>
+              <a:off x="1088970" y="4081095"/>
+              <a:ext cx="974922" cy="1371600"/>
+            </a:xfrm>
+            <a:prstGeom prst="rect">
+              <a:avLst/>
+            </a:prstGeom>
+          </p:spPr>
+        </p:pic>
+        <p:pic>
+          <p:nvPicPr>
+            <p:cNvPr id="17" name="Picture 16" descr="A white rectangular object with a black border&#10;&#10;Description automatically generated">
+              <a:extLst>
+                <a:ext uri="{FF2B5EF4-FFF2-40B4-BE49-F238E27FC236}">
+                  <a16:creationId xmlns:a16="http://schemas.microsoft.com/office/drawing/2014/main" id="{A2AD01BC-E30D-BBE0-808C-E181AF009B5C}"/>
+                </a:ext>
+              </a:extLst>
+            </p:cNvPr>
+            <p:cNvPicPr>
+              <a:picLocks noChangeAspect="1"/>
+            </p:cNvPicPr>
+            <p:nvPr/>
+          </p:nvPicPr>
+          <p:blipFill>
+            <a:blip r:embed="rId2"/>
+            <a:stretch>
+              <a:fillRect/>
+            </a:stretch>
+          </p:blipFill>
+          <p:spPr>
+            <a:xfrm>
+              <a:off x="1088970" y="47704"/>
+              <a:ext cx="974922" cy="1371600"/>
+            </a:xfrm>
+            <a:prstGeom prst="rect">
+              <a:avLst/>
+            </a:prstGeom>
+          </p:spPr>
+        </p:pic>
+        <p:pic>
+          <p:nvPicPr>
+            <p:cNvPr id="18" name="Picture 17" descr="A white rectangular object with a black border&#10;&#10;Description automatically generated">
+              <a:extLst>
+                <a:ext uri="{FF2B5EF4-FFF2-40B4-BE49-F238E27FC236}">
+                  <a16:creationId xmlns:a16="http://schemas.microsoft.com/office/drawing/2014/main" id="{EB866DB1-A8C3-94D3-A766-2614021E3EC9}"/>
+                </a:ext>
+              </a:extLst>
+            </p:cNvPr>
+            <p:cNvPicPr>
+              <a:picLocks noChangeAspect="1"/>
+            </p:cNvPicPr>
+            <p:nvPr/>
+          </p:nvPicPr>
+          <p:blipFill>
+            <a:blip r:embed="rId2"/>
+            <a:stretch>
+              <a:fillRect/>
+            </a:stretch>
+          </p:blipFill>
+          <p:spPr>
+            <a:xfrm>
+              <a:off x="4051286" y="47704"/>
+              <a:ext cx="974922" cy="1371600"/>
+            </a:xfrm>
+            <a:prstGeom prst="rect">
+              <a:avLst/>
+            </a:prstGeom>
+          </p:spPr>
+        </p:pic>
+        <p:pic>
+          <p:nvPicPr>
+            <p:cNvPr id="19" name="Picture 18" descr="A white rectangular object with a black border&#10;&#10;Description automatically generated">
+              <a:extLst>
+                <a:ext uri="{FF2B5EF4-FFF2-40B4-BE49-F238E27FC236}">
+                  <a16:creationId xmlns:a16="http://schemas.microsoft.com/office/drawing/2014/main" id="{611E7057-1B7C-45CF-3C5D-E4F77AC398BF}"/>
+                </a:ext>
+              </a:extLst>
+            </p:cNvPr>
+            <p:cNvPicPr>
+              <a:picLocks noChangeAspect="1"/>
+            </p:cNvPicPr>
+            <p:nvPr/>
+          </p:nvPicPr>
+          <p:blipFill>
+            <a:blip r:embed="rId2"/>
+            <a:stretch>
+              <a:fillRect/>
+            </a:stretch>
+          </p:blipFill>
+          <p:spPr>
+            <a:xfrm>
+              <a:off x="5051901" y="47704"/>
+              <a:ext cx="974922" cy="1371600"/>
+            </a:xfrm>
+            <a:prstGeom prst="rect">
+              <a:avLst/>
+            </a:prstGeom>
+          </p:spPr>
+        </p:pic>
+        <p:pic>
+          <p:nvPicPr>
+            <p:cNvPr id="20" name="Picture 19" descr="A white rectangular object with a black border&#10;&#10;Description automatically generated">
+              <a:extLst>
+                <a:ext uri="{FF2B5EF4-FFF2-40B4-BE49-F238E27FC236}">
+                  <a16:creationId xmlns:a16="http://schemas.microsoft.com/office/drawing/2014/main" id="{34F12ED6-B72F-46E8-BE93-836B654E8C43}"/>
+                </a:ext>
+              </a:extLst>
+            </p:cNvPr>
+            <p:cNvPicPr>
+              <a:picLocks noChangeAspect="1"/>
+            </p:cNvPicPr>
+            <p:nvPr/>
+          </p:nvPicPr>
+          <p:blipFill>
+            <a:blip r:embed="rId2"/>
+            <a:stretch>
+              <a:fillRect/>
+            </a:stretch>
+          </p:blipFill>
+          <p:spPr>
+            <a:xfrm>
+              <a:off x="6038290" y="47704"/>
+              <a:ext cx="974922" cy="1371600"/>
+            </a:xfrm>
+            <a:prstGeom prst="rect">
+              <a:avLst/>
+            </a:prstGeom>
+          </p:spPr>
+        </p:pic>
+        <p:pic>
+          <p:nvPicPr>
+            <p:cNvPr id="21" name="Picture 20" descr="A white rectangular object with a black border&#10;&#10;Description automatically generated">
+              <a:extLst>
+                <a:ext uri="{FF2B5EF4-FFF2-40B4-BE49-F238E27FC236}">
+                  <a16:creationId xmlns:a16="http://schemas.microsoft.com/office/drawing/2014/main" id="{B78D21C8-420F-CE1F-C944-FD33C108A1CF}"/>
+                </a:ext>
+              </a:extLst>
+            </p:cNvPr>
+            <p:cNvPicPr>
+              <a:picLocks noChangeAspect="1"/>
+            </p:cNvPicPr>
+            <p:nvPr/>
+          </p:nvPicPr>
+          <p:blipFill>
+            <a:blip r:embed="rId2"/>
+            <a:stretch>
+              <a:fillRect/>
+            </a:stretch>
+          </p:blipFill>
+          <p:spPr>
+            <a:xfrm>
+              <a:off x="7041660" y="2746566"/>
+              <a:ext cx="974922" cy="1371600"/>
+            </a:xfrm>
+            <a:prstGeom prst="rect">
+              <a:avLst/>
+            </a:prstGeom>
+          </p:spPr>
+        </p:pic>
+        <p:pic>
+          <p:nvPicPr>
+            <p:cNvPr id="22" name="Picture 21" descr="A white rectangular object with a black border&#10;&#10;Description automatically generated">
+              <a:extLst>
+                <a:ext uri="{FF2B5EF4-FFF2-40B4-BE49-F238E27FC236}">
+                  <a16:creationId xmlns:a16="http://schemas.microsoft.com/office/drawing/2014/main" id="{889253E4-4498-192D-1430-6AB423605009}"/>
+                </a:ext>
+              </a:extLst>
+            </p:cNvPr>
+            <p:cNvPicPr>
+              <a:picLocks noChangeAspect="1"/>
+            </p:cNvPicPr>
+            <p:nvPr/>
+          </p:nvPicPr>
+          <p:blipFill>
+            <a:blip r:embed="rId2"/>
+            <a:stretch>
+              <a:fillRect/>
+            </a:stretch>
+          </p:blipFill>
+          <p:spPr>
+            <a:xfrm>
+              <a:off x="6038290" y="1400846"/>
+              <a:ext cx="974922" cy="1371600"/>
+            </a:xfrm>
+            <a:prstGeom prst="rect">
+              <a:avLst/>
+            </a:prstGeom>
+          </p:spPr>
+        </p:pic>
+        <p:pic>
+          <p:nvPicPr>
+            <p:cNvPr id="6" name="Picture 5" descr="A white rectangular object with a black border&#10;&#10;Description automatically generated">
+              <a:extLst>
+                <a:ext uri="{FF2B5EF4-FFF2-40B4-BE49-F238E27FC236}">
+                  <a16:creationId xmlns:a16="http://schemas.microsoft.com/office/drawing/2014/main" id="{EF5D0FA0-EFD9-9E50-9719-B040C7049477}"/>
+                </a:ext>
+              </a:extLst>
+            </p:cNvPr>
+            <p:cNvPicPr>
+              <a:picLocks noChangeAspect="1"/>
+            </p:cNvPicPr>
+            <p:nvPr/>
+          </p:nvPicPr>
+          <p:blipFill>
+            <a:blip r:embed="rId2"/>
+            <a:stretch>
+              <a:fillRect/>
+            </a:stretch>
+          </p:blipFill>
+          <p:spPr>
+            <a:xfrm>
+              <a:off x="3081486" y="47704"/>
+              <a:ext cx="974922" cy="1371600"/>
+            </a:xfrm>
+            <a:prstGeom prst="rect">
+              <a:avLst/>
+            </a:prstGeom>
+          </p:spPr>
+        </p:pic>
+        <p:pic>
+          <p:nvPicPr>
+            <p:cNvPr id="8" name="Picture 7" descr="A white rectangular object with a black border&#10;&#10;Description automatically generated">
+              <a:extLst>
+                <a:ext uri="{FF2B5EF4-FFF2-40B4-BE49-F238E27FC236}">
+                  <a16:creationId xmlns:a16="http://schemas.microsoft.com/office/drawing/2014/main" id="{6B2F2DFB-EA4A-D9AF-C9A9-CA2FB3C41351}"/>
+                </a:ext>
+              </a:extLst>
+            </p:cNvPr>
+            <p:cNvPicPr>
+              <a:picLocks noChangeAspect="1"/>
+            </p:cNvPicPr>
+            <p:nvPr/>
+          </p:nvPicPr>
+          <p:blipFill>
+            <a:blip r:embed="rId2"/>
+            <a:stretch>
+              <a:fillRect/>
+            </a:stretch>
+          </p:blipFill>
+          <p:spPr>
+            <a:xfrm>
+              <a:off x="7041660" y="1400846"/>
+              <a:ext cx="974922" cy="1371600"/>
+            </a:xfrm>
+            <a:prstGeom prst="rect">
+              <a:avLst/>
+            </a:prstGeom>
+          </p:spPr>
+        </p:pic>
+        <p:pic>
+          <p:nvPicPr>
+            <p:cNvPr id="9" name="Picture 8" descr="A white rectangular object with a black border&#10;&#10;Description automatically generated">
+              <a:extLst>
+                <a:ext uri="{FF2B5EF4-FFF2-40B4-BE49-F238E27FC236}">
+                  <a16:creationId xmlns:a16="http://schemas.microsoft.com/office/drawing/2014/main" id="{7A10BA67-51EF-04A3-453C-9853F47EFF44}"/>
+                </a:ext>
+              </a:extLst>
+            </p:cNvPr>
+            <p:cNvPicPr>
+              <a:picLocks noChangeAspect="1"/>
+            </p:cNvPicPr>
+            <p:nvPr/>
+          </p:nvPicPr>
+          <p:blipFill>
+            <a:blip r:embed="rId2"/>
+            <a:stretch>
+              <a:fillRect/>
+            </a:stretch>
+          </p:blipFill>
+          <p:spPr>
+            <a:xfrm>
+              <a:off x="7041660" y="47704"/>
+              <a:ext cx="974922" cy="1371600"/>
+            </a:xfrm>
+            <a:prstGeom prst="rect">
+              <a:avLst/>
+            </a:prstGeom>
+          </p:spPr>
+        </p:pic>
+        <p:pic>
+          <p:nvPicPr>
+            <p:cNvPr id="11" name="Picture 10" descr="A white rectangular object with a black border&#10;&#10;Description automatically generated">
+              <a:extLst>
+                <a:ext uri="{FF2B5EF4-FFF2-40B4-BE49-F238E27FC236}">
+                  <a16:creationId xmlns:a16="http://schemas.microsoft.com/office/drawing/2014/main" id="{A2196537-5077-E051-5D7B-1898B6DAB208}"/>
+                </a:ext>
+              </a:extLst>
+            </p:cNvPr>
+            <p:cNvPicPr>
+              <a:picLocks noChangeAspect="1"/>
+            </p:cNvPicPr>
+            <p:nvPr/>
+          </p:nvPicPr>
+          <p:blipFill>
+            <a:blip r:embed="rId2"/>
+            <a:stretch>
+              <a:fillRect/>
+            </a:stretch>
+          </p:blipFill>
+          <p:spPr>
+            <a:xfrm>
+              <a:off x="7041660" y="4081095"/>
+              <a:ext cx="974922" cy="1371600"/>
+            </a:xfrm>
+            <a:prstGeom prst="rect">
+              <a:avLst/>
+            </a:prstGeom>
+          </p:spPr>
+        </p:pic>
+        <p:pic>
+          <p:nvPicPr>
+            <p:cNvPr id="12" name="Picture 11" descr="A white rectangular object with a black border&#10;&#10;Description automatically generated">
+              <a:extLst>
+                <a:ext uri="{FF2B5EF4-FFF2-40B4-BE49-F238E27FC236}">
+                  <a16:creationId xmlns:a16="http://schemas.microsoft.com/office/drawing/2014/main" id="{478D8704-0AB1-508D-6C70-80C82E594F60}"/>
+                </a:ext>
+              </a:extLst>
+            </p:cNvPr>
+            <p:cNvPicPr>
+              <a:picLocks noChangeAspect="1"/>
+            </p:cNvPicPr>
+            <p:nvPr/>
+          </p:nvPicPr>
+          <p:blipFill>
+            <a:blip r:embed="rId2"/>
+            <a:stretch>
+              <a:fillRect/>
+            </a:stretch>
+          </p:blipFill>
+          <p:spPr>
+            <a:xfrm>
+              <a:off x="8002356" y="4081095"/>
+              <a:ext cx="974922" cy="1371600"/>
+            </a:xfrm>
+            <a:prstGeom prst="rect">
+              <a:avLst/>
+            </a:prstGeom>
+          </p:spPr>
+        </p:pic>
+        <p:pic>
+          <p:nvPicPr>
+            <p:cNvPr id="13" name="Picture 12" descr="A white rectangular object with a black border&#10;&#10;Description automatically generated">
+              <a:extLst>
+                <a:ext uri="{FF2B5EF4-FFF2-40B4-BE49-F238E27FC236}">
+                  <a16:creationId xmlns:a16="http://schemas.microsoft.com/office/drawing/2014/main" id="{B17A0D06-8C2F-47C4-4E99-4B529A11D32E}"/>
+                </a:ext>
+              </a:extLst>
+            </p:cNvPr>
+            <p:cNvPicPr>
+              <a:picLocks noChangeAspect="1"/>
+            </p:cNvPicPr>
+            <p:nvPr/>
+          </p:nvPicPr>
+          <p:blipFill>
+            <a:blip r:embed="rId2"/>
+            <a:stretch>
+              <a:fillRect/>
+            </a:stretch>
+          </p:blipFill>
+          <p:spPr>
+            <a:xfrm>
+              <a:off x="9005728" y="4081095"/>
+              <a:ext cx="974922" cy="1371600"/>
+            </a:xfrm>
+            <a:prstGeom prst="rect">
+              <a:avLst/>
+            </a:prstGeom>
+          </p:spPr>
+        </p:pic>
+        <p:pic>
+          <p:nvPicPr>
+            <p:cNvPr id="14" name="Picture 13" descr="A white rectangular object with a black border&#10;&#10;Description automatically generated">
+              <a:extLst>
+                <a:ext uri="{FF2B5EF4-FFF2-40B4-BE49-F238E27FC236}">
+                  <a16:creationId xmlns:a16="http://schemas.microsoft.com/office/drawing/2014/main" id="{E7DECEA5-7DB6-729B-9EA9-EE8423EAEC50}"/>
+                </a:ext>
+              </a:extLst>
+            </p:cNvPr>
+            <p:cNvPicPr>
+              <a:picLocks noChangeAspect="1"/>
+            </p:cNvPicPr>
+            <p:nvPr/>
+          </p:nvPicPr>
+          <p:blipFill>
+            <a:blip r:embed="rId2"/>
+            <a:stretch>
+              <a:fillRect/>
+            </a:stretch>
+          </p:blipFill>
+          <p:spPr>
+            <a:xfrm>
+              <a:off x="10009095" y="4081095"/>
+              <a:ext cx="974922" cy="1371600"/>
+            </a:xfrm>
+            <a:prstGeom prst="rect">
+              <a:avLst/>
+            </a:prstGeom>
+          </p:spPr>
+        </p:pic>
+        <p:pic>
+          <p:nvPicPr>
+            <p:cNvPr id="15" name="Picture 14" descr="A white rectangular object with a black border&#10;&#10;Description automatically generated">
+              <a:extLst>
+                <a:ext uri="{FF2B5EF4-FFF2-40B4-BE49-F238E27FC236}">
+                  <a16:creationId xmlns:a16="http://schemas.microsoft.com/office/drawing/2014/main" id="{DF85424E-64F0-8C3D-0F66-61F89B46FECF}"/>
+                </a:ext>
+              </a:extLst>
+            </p:cNvPr>
+            <p:cNvPicPr>
+              <a:picLocks noChangeAspect="1"/>
+            </p:cNvPicPr>
+            <p:nvPr/>
+          </p:nvPicPr>
+          <p:blipFill>
+            <a:blip r:embed="rId2"/>
+            <a:stretch>
+              <a:fillRect/>
+            </a:stretch>
+          </p:blipFill>
+          <p:spPr>
+            <a:xfrm>
+              <a:off x="8002356" y="2746566"/>
+              <a:ext cx="974922" cy="1371600"/>
+            </a:xfrm>
+            <a:prstGeom prst="rect">
+              <a:avLst/>
+            </a:prstGeom>
+          </p:spPr>
+        </p:pic>
+        <p:pic>
+          <p:nvPicPr>
+            <p:cNvPr id="23" name="Picture 22" descr="A white rectangular object with a black border&#10;&#10;Description automatically generated">
+              <a:extLst>
+                <a:ext uri="{FF2B5EF4-FFF2-40B4-BE49-F238E27FC236}">
+                  <a16:creationId xmlns:a16="http://schemas.microsoft.com/office/drawing/2014/main" id="{797C173B-D8CA-9CB3-7920-D176BA5A7EAA}"/>
+                </a:ext>
+              </a:extLst>
+            </p:cNvPr>
+            <p:cNvPicPr>
+              <a:picLocks noChangeAspect="1"/>
+            </p:cNvPicPr>
+            <p:nvPr/>
+          </p:nvPicPr>
+          <p:blipFill>
+            <a:blip r:embed="rId2"/>
+            <a:stretch>
+              <a:fillRect/>
+            </a:stretch>
+          </p:blipFill>
+          <p:spPr>
+            <a:xfrm>
+              <a:off x="9005728" y="2746566"/>
+              <a:ext cx="974922" cy="1371600"/>
+            </a:xfrm>
+            <a:prstGeom prst="rect">
+              <a:avLst/>
+            </a:prstGeom>
+          </p:spPr>
+        </p:pic>
+        <p:pic>
+          <p:nvPicPr>
+            <p:cNvPr id="24" name="Picture 23" descr="A white rectangular object with a black border&#10;&#10;Description automatically generated">
+              <a:extLst>
+                <a:ext uri="{FF2B5EF4-FFF2-40B4-BE49-F238E27FC236}">
+                  <a16:creationId xmlns:a16="http://schemas.microsoft.com/office/drawing/2014/main" id="{5D81110C-E188-0067-4848-6B27C79792C7}"/>
+                </a:ext>
+              </a:extLst>
+            </p:cNvPr>
+            <p:cNvPicPr>
+              <a:picLocks noChangeAspect="1"/>
+            </p:cNvPicPr>
+            <p:nvPr/>
+          </p:nvPicPr>
+          <p:blipFill>
+            <a:blip r:embed="rId2"/>
+            <a:stretch>
+              <a:fillRect/>
+            </a:stretch>
+          </p:blipFill>
+          <p:spPr>
+            <a:xfrm>
+              <a:off x="10009095" y="2746566"/>
+              <a:ext cx="974922" cy="1371600"/>
+            </a:xfrm>
+            <a:prstGeom prst="rect">
+              <a:avLst/>
+            </a:prstGeom>
+          </p:spPr>
+        </p:pic>
+        <p:pic>
+          <p:nvPicPr>
+            <p:cNvPr id="25" name="Picture 24" descr="A white rectangular object with a black border&#10;&#10;Description automatically generated">
+              <a:extLst>
+                <a:ext uri="{FF2B5EF4-FFF2-40B4-BE49-F238E27FC236}">
+                  <a16:creationId xmlns:a16="http://schemas.microsoft.com/office/drawing/2014/main" id="{43B91FF2-D36A-D93C-008C-68249D1C696C}"/>
+                </a:ext>
+              </a:extLst>
+            </p:cNvPr>
+            <p:cNvPicPr>
+              <a:picLocks noChangeAspect="1"/>
+            </p:cNvPicPr>
+            <p:nvPr/>
+          </p:nvPicPr>
+          <p:blipFill>
+            <a:blip r:embed="rId2"/>
+            <a:stretch>
+              <a:fillRect/>
+            </a:stretch>
+          </p:blipFill>
+          <p:spPr>
+            <a:xfrm>
+              <a:off x="8002356" y="1400846"/>
+              <a:ext cx="974922" cy="1371600"/>
+            </a:xfrm>
+            <a:prstGeom prst="rect">
+              <a:avLst/>
+            </a:prstGeom>
+          </p:spPr>
+        </p:pic>
+        <p:pic>
+          <p:nvPicPr>
+            <p:cNvPr id="26" name="Picture 25" descr="A white rectangular object with a black border&#10;&#10;Description automatically generated">
+              <a:extLst>
+                <a:ext uri="{FF2B5EF4-FFF2-40B4-BE49-F238E27FC236}">
+                  <a16:creationId xmlns:a16="http://schemas.microsoft.com/office/drawing/2014/main" id="{28AC7A32-B574-7411-C6E7-CDA9634FC7B7}"/>
+                </a:ext>
+              </a:extLst>
+            </p:cNvPr>
+            <p:cNvPicPr>
+              <a:picLocks noChangeAspect="1"/>
+            </p:cNvPicPr>
+            <p:nvPr/>
+          </p:nvPicPr>
+          <p:blipFill>
+            <a:blip r:embed="rId2"/>
+            <a:stretch>
+              <a:fillRect/>
+            </a:stretch>
+          </p:blipFill>
+          <p:spPr>
+            <a:xfrm>
+              <a:off x="9005728" y="1400846"/>
+              <a:ext cx="974922" cy="1371600"/>
+            </a:xfrm>
+            <a:prstGeom prst="rect">
+              <a:avLst/>
+            </a:prstGeom>
+          </p:spPr>
+        </p:pic>
+        <p:pic>
+          <p:nvPicPr>
+            <p:cNvPr id="27" name="Picture 26" descr="A white rectangular object with a black border&#10;&#10;Description automatically generated">
+              <a:extLst>
+                <a:ext uri="{FF2B5EF4-FFF2-40B4-BE49-F238E27FC236}">
+                  <a16:creationId xmlns:a16="http://schemas.microsoft.com/office/drawing/2014/main" id="{6D0ABB0F-36FD-A29E-CCF0-A002F15C0379}"/>
+                </a:ext>
+              </a:extLst>
+            </p:cNvPr>
+            <p:cNvPicPr>
+              <a:picLocks noChangeAspect="1"/>
+            </p:cNvPicPr>
+            <p:nvPr/>
+          </p:nvPicPr>
+          <p:blipFill>
+            <a:blip r:embed="rId2"/>
+            <a:stretch>
+              <a:fillRect/>
+            </a:stretch>
+          </p:blipFill>
+          <p:spPr>
+            <a:xfrm>
+              <a:off x="10009095" y="1400846"/>
+              <a:ext cx="974922" cy="1371600"/>
+            </a:xfrm>
+            <a:prstGeom prst="rect">
+              <a:avLst/>
+            </a:prstGeom>
+          </p:spPr>
+        </p:pic>
+        <p:pic>
+          <p:nvPicPr>
+            <p:cNvPr id="28" name="Picture 27" descr="A white rectangular object with a black border&#10;&#10;Description automatically generated">
+              <a:extLst>
+                <a:ext uri="{FF2B5EF4-FFF2-40B4-BE49-F238E27FC236}">
+                  <a16:creationId xmlns:a16="http://schemas.microsoft.com/office/drawing/2014/main" id="{8551F7D3-A7E1-1A0D-594F-EF79418D5841}"/>
+                </a:ext>
+              </a:extLst>
+            </p:cNvPr>
+            <p:cNvPicPr>
+              <a:picLocks noChangeAspect="1"/>
+            </p:cNvPicPr>
+            <p:nvPr/>
+          </p:nvPicPr>
+          <p:blipFill>
+            <a:blip r:embed="rId2"/>
+            <a:stretch>
+              <a:fillRect/>
+            </a:stretch>
+          </p:blipFill>
+          <p:spPr>
+            <a:xfrm>
+              <a:off x="8002356" y="47704"/>
+              <a:ext cx="974922" cy="1371600"/>
+            </a:xfrm>
+            <a:prstGeom prst="rect">
+              <a:avLst/>
+            </a:prstGeom>
+          </p:spPr>
+        </p:pic>
+        <p:pic>
+          <p:nvPicPr>
+            <p:cNvPr id="29" name="Picture 28" descr="A white rectangular object with a black border&#10;&#10;Description automatically generated">
+              <a:extLst>
+                <a:ext uri="{FF2B5EF4-FFF2-40B4-BE49-F238E27FC236}">
+                  <a16:creationId xmlns:a16="http://schemas.microsoft.com/office/drawing/2014/main" id="{66098B94-3FA3-49F1-DB77-39EF9D09DC35}"/>
+                </a:ext>
+              </a:extLst>
+            </p:cNvPr>
+            <p:cNvPicPr>
+              <a:picLocks noChangeAspect="1"/>
+            </p:cNvPicPr>
+            <p:nvPr/>
+          </p:nvPicPr>
+          <p:blipFill>
+            <a:blip r:embed="rId2"/>
+            <a:stretch>
+              <a:fillRect/>
+            </a:stretch>
+          </p:blipFill>
+          <p:spPr>
+            <a:xfrm>
+              <a:off x="9005728" y="47704"/>
+              <a:ext cx="974922" cy="1371600"/>
+            </a:xfrm>
+            <a:prstGeom prst="rect">
+              <a:avLst/>
+            </a:prstGeom>
+          </p:spPr>
+        </p:pic>
+        <p:pic>
+          <p:nvPicPr>
+            <p:cNvPr id="30" name="Picture 29" descr="A white rectangular object with a black border&#10;&#10;Description automatically generated">
+              <a:extLst>
+                <a:ext uri="{FF2B5EF4-FFF2-40B4-BE49-F238E27FC236}">
+                  <a16:creationId xmlns:a16="http://schemas.microsoft.com/office/drawing/2014/main" id="{0499FEF6-C347-6E73-23FA-0F229154FB1D}"/>
+                </a:ext>
+              </a:extLst>
+            </p:cNvPr>
+            <p:cNvPicPr>
+              <a:picLocks noChangeAspect="1"/>
+            </p:cNvPicPr>
+            <p:nvPr/>
+          </p:nvPicPr>
+          <p:blipFill>
+            <a:blip r:embed="rId2"/>
+            <a:stretch>
+              <a:fillRect/>
+            </a:stretch>
+          </p:blipFill>
+          <p:spPr>
+            <a:xfrm>
+              <a:off x="10009095" y="47704"/>
+              <a:ext cx="974922" cy="1371600"/>
+            </a:xfrm>
+            <a:prstGeom prst="rect">
+              <a:avLst/>
+            </a:prstGeom>
+          </p:spPr>
+        </p:pic>
+        <p:pic>
+          <p:nvPicPr>
+            <p:cNvPr id="31" name="Picture 30" descr="A white rectangular object with a black border&#10;&#10;Description automatically generated">
+              <a:extLst>
+                <a:ext uri="{FF2B5EF4-FFF2-40B4-BE49-F238E27FC236}">
+                  <a16:creationId xmlns:a16="http://schemas.microsoft.com/office/drawing/2014/main" id="{708FAB17-D531-6780-4DFE-966BBC0048C5}"/>
+                </a:ext>
+              </a:extLst>
+            </p:cNvPr>
+            <p:cNvPicPr>
+              <a:picLocks noChangeAspect="1"/>
+            </p:cNvPicPr>
+            <p:nvPr/>
+          </p:nvPicPr>
+          <p:blipFill>
+            <a:blip r:embed="rId2"/>
+            <a:stretch>
+              <a:fillRect/>
+            </a:stretch>
+          </p:blipFill>
+          <p:spPr>
+            <a:xfrm>
+              <a:off x="8002356" y="5415207"/>
+              <a:ext cx="974922" cy="1371600"/>
+            </a:xfrm>
+            <a:prstGeom prst="rect">
+              <a:avLst/>
+            </a:prstGeom>
+          </p:spPr>
+        </p:pic>
+        <p:pic>
+          <p:nvPicPr>
+            <p:cNvPr id="32" name="Picture 31" descr="A white rectangular object with a black border&#10;&#10;Description automatically generated">
+              <a:extLst>
+                <a:ext uri="{FF2B5EF4-FFF2-40B4-BE49-F238E27FC236}">
+                  <a16:creationId xmlns:a16="http://schemas.microsoft.com/office/drawing/2014/main" id="{9774159F-D87F-34D0-1FC8-306503D28EA6}"/>
+                </a:ext>
+              </a:extLst>
+            </p:cNvPr>
+            <p:cNvPicPr>
+              <a:picLocks noChangeAspect="1"/>
+            </p:cNvPicPr>
+            <p:nvPr/>
+          </p:nvPicPr>
+          <p:blipFill>
+            <a:blip r:embed="rId2"/>
+            <a:stretch>
+              <a:fillRect/>
+            </a:stretch>
+          </p:blipFill>
+          <p:spPr>
+            <a:xfrm>
+              <a:off x="9005728" y="5415207"/>
+              <a:ext cx="974922" cy="1371600"/>
+            </a:xfrm>
+            <a:prstGeom prst="rect">
+              <a:avLst/>
+            </a:prstGeom>
+          </p:spPr>
+        </p:pic>
+        <p:pic>
+          <p:nvPicPr>
+            <p:cNvPr id="33" name="Picture 32" descr="A white rectangular object with a black border&#10;&#10;Description automatically generated">
+              <a:extLst>
+                <a:ext uri="{FF2B5EF4-FFF2-40B4-BE49-F238E27FC236}">
+                  <a16:creationId xmlns:a16="http://schemas.microsoft.com/office/drawing/2014/main" id="{3A4A00A7-B422-38EE-3F64-57D4A36C6E89}"/>
+                </a:ext>
+              </a:extLst>
+            </p:cNvPr>
+            <p:cNvPicPr>
+              <a:picLocks noChangeAspect="1"/>
+            </p:cNvPicPr>
+            <p:nvPr/>
+          </p:nvPicPr>
+          <p:blipFill>
+            <a:blip r:embed="rId2"/>
+            <a:stretch>
+              <a:fillRect/>
+            </a:stretch>
+          </p:blipFill>
+          <p:spPr>
+            <a:xfrm>
+              <a:off x="10009095" y="5415207"/>
+              <a:ext cx="974922" cy="1371600"/>
+            </a:xfrm>
+            <a:prstGeom prst="rect">
+              <a:avLst/>
+            </a:prstGeom>
+          </p:spPr>
+        </p:pic>
+        <p:pic>
+          <p:nvPicPr>
+            <p:cNvPr id="34" name="Picture 33" descr="A white rectangular object with a black border&#10;&#10;Description automatically generated">
+              <a:extLst>
+                <a:ext uri="{FF2B5EF4-FFF2-40B4-BE49-F238E27FC236}">
+                  <a16:creationId xmlns:a16="http://schemas.microsoft.com/office/drawing/2014/main" id="{699445C5-340C-6B71-6884-279427666FCA}"/>
+                </a:ext>
+              </a:extLst>
+            </p:cNvPr>
+            <p:cNvPicPr>
+              <a:picLocks noChangeAspect="1"/>
+            </p:cNvPicPr>
+            <p:nvPr/>
+          </p:nvPicPr>
+          <p:blipFill>
+            <a:blip r:embed="rId2"/>
+            <a:stretch>
+              <a:fillRect/>
+            </a:stretch>
+          </p:blipFill>
+          <p:spPr>
+            <a:xfrm>
+              <a:off x="4051286" y="5415207"/>
+              <a:ext cx="974922" cy="1371600"/>
+            </a:xfrm>
+            <a:prstGeom prst="rect">
+              <a:avLst/>
+            </a:prstGeom>
+          </p:spPr>
+        </p:pic>
+        <p:pic>
+          <p:nvPicPr>
+            <p:cNvPr id="35" name="Picture 34" descr="A white rectangular object with a black border&#10;&#10;Description automatically generated">
+              <a:extLst>
+                <a:ext uri="{FF2B5EF4-FFF2-40B4-BE49-F238E27FC236}">
+                  <a16:creationId xmlns:a16="http://schemas.microsoft.com/office/drawing/2014/main" id="{DC10077F-0CAD-271E-0258-A28416CB12AC}"/>
+                </a:ext>
+              </a:extLst>
+            </p:cNvPr>
+            <p:cNvPicPr>
+              <a:picLocks noChangeAspect="1"/>
+            </p:cNvPicPr>
+            <p:nvPr/>
+          </p:nvPicPr>
+          <p:blipFill>
+            <a:blip r:embed="rId2"/>
+            <a:stretch>
+              <a:fillRect/>
+            </a:stretch>
+          </p:blipFill>
+          <p:spPr>
+            <a:xfrm>
+              <a:off x="5051901" y="5415207"/>
+              <a:ext cx="974922" cy="1371600"/>
+            </a:xfrm>
+            <a:prstGeom prst="rect">
+              <a:avLst/>
+            </a:prstGeom>
+          </p:spPr>
+        </p:pic>
+        <p:pic>
+          <p:nvPicPr>
+            <p:cNvPr id="36" name="Picture 35" descr="A white rectangular object with a black border&#10;&#10;Description automatically generated">
+              <a:extLst>
+                <a:ext uri="{FF2B5EF4-FFF2-40B4-BE49-F238E27FC236}">
+                  <a16:creationId xmlns:a16="http://schemas.microsoft.com/office/drawing/2014/main" id="{367CC578-9488-60C2-9A9E-41B0D33D38E7}"/>
+                </a:ext>
+              </a:extLst>
+            </p:cNvPr>
+            <p:cNvPicPr>
+              <a:picLocks noChangeAspect="1"/>
+            </p:cNvPicPr>
+            <p:nvPr/>
+          </p:nvPicPr>
+          <p:blipFill>
+            <a:blip r:embed="rId2"/>
+            <a:stretch>
+              <a:fillRect/>
+            </a:stretch>
+          </p:blipFill>
+          <p:spPr>
+            <a:xfrm>
+              <a:off x="6038290" y="5415207"/>
+              <a:ext cx="974922" cy="1371600"/>
+            </a:xfrm>
+            <a:prstGeom prst="rect">
+              <a:avLst/>
+            </a:prstGeom>
+          </p:spPr>
+        </p:pic>
+        <p:pic>
+          <p:nvPicPr>
+            <p:cNvPr id="37" name="Picture 36" descr="A white rectangular object with a black border&#10;&#10;Description automatically generated">
+              <a:extLst>
+                <a:ext uri="{FF2B5EF4-FFF2-40B4-BE49-F238E27FC236}">
+                  <a16:creationId xmlns:a16="http://schemas.microsoft.com/office/drawing/2014/main" id="{C53AD3DC-195A-1509-467F-3988A75B6B33}"/>
+                </a:ext>
+              </a:extLst>
+            </p:cNvPr>
+            <p:cNvPicPr>
+              <a:picLocks noChangeAspect="1"/>
+            </p:cNvPicPr>
+            <p:nvPr/>
+          </p:nvPicPr>
+          <p:blipFill>
+            <a:blip r:embed="rId2"/>
+            <a:stretch>
+              <a:fillRect/>
+            </a:stretch>
+          </p:blipFill>
+          <p:spPr>
+            <a:xfrm>
+              <a:off x="4051286" y="4081095"/>
+              <a:ext cx="974922" cy="1371600"/>
+            </a:xfrm>
+            <a:prstGeom prst="rect">
+              <a:avLst/>
+            </a:prstGeom>
+          </p:spPr>
+        </p:pic>
+        <p:pic>
+          <p:nvPicPr>
+            <p:cNvPr id="38" name="Picture 37" descr="A white rectangular object with a black border&#10;&#10;Description automatically generated">
+              <a:extLst>
+                <a:ext uri="{FF2B5EF4-FFF2-40B4-BE49-F238E27FC236}">
+                  <a16:creationId xmlns:a16="http://schemas.microsoft.com/office/drawing/2014/main" id="{D70407A3-B5E6-3F1B-8622-1CD33A5FF809}"/>
+                </a:ext>
+              </a:extLst>
+            </p:cNvPr>
+            <p:cNvPicPr>
+              <a:picLocks noChangeAspect="1"/>
+            </p:cNvPicPr>
+            <p:nvPr/>
+          </p:nvPicPr>
+          <p:blipFill>
+            <a:blip r:embed="rId2"/>
+            <a:stretch>
+              <a:fillRect/>
+            </a:stretch>
+          </p:blipFill>
+          <p:spPr>
+            <a:xfrm>
+              <a:off x="5051901" y="4081095"/>
+              <a:ext cx="974922" cy="1371600"/>
+            </a:xfrm>
+            <a:prstGeom prst="rect">
+              <a:avLst/>
+            </a:prstGeom>
+          </p:spPr>
+        </p:pic>
+        <p:pic>
+          <p:nvPicPr>
+            <p:cNvPr id="39" name="Picture 38" descr="A white rectangular object with a black border&#10;&#10;Description automatically generated">
+              <a:extLst>
+                <a:ext uri="{FF2B5EF4-FFF2-40B4-BE49-F238E27FC236}">
+                  <a16:creationId xmlns:a16="http://schemas.microsoft.com/office/drawing/2014/main" id="{63387A4D-8093-5910-4135-01AA18F6A8AA}"/>
+                </a:ext>
+              </a:extLst>
+            </p:cNvPr>
+            <p:cNvPicPr>
+              <a:picLocks noChangeAspect="1"/>
+            </p:cNvPicPr>
+            <p:nvPr/>
+          </p:nvPicPr>
+          <p:blipFill>
+            <a:blip r:embed="rId2"/>
+            <a:stretch>
+              <a:fillRect/>
+            </a:stretch>
+          </p:blipFill>
+          <p:spPr>
+            <a:xfrm>
+              <a:off x="6038290" y="4081095"/>
+              <a:ext cx="974922" cy="1371600"/>
+            </a:xfrm>
+            <a:prstGeom prst="rect">
+              <a:avLst/>
+            </a:prstGeom>
+          </p:spPr>
+        </p:pic>
+        <p:pic>
+          <p:nvPicPr>
+            <p:cNvPr id="40" name="Picture 39" descr="A white rectangular object with a black border&#10;&#10;Description automatically generated">
+              <a:extLst>
+                <a:ext uri="{FF2B5EF4-FFF2-40B4-BE49-F238E27FC236}">
+                  <a16:creationId xmlns:a16="http://schemas.microsoft.com/office/drawing/2014/main" id="{5DE342E7-2130-AEB0-5014-686DE12ED8CC}"/>
+                </a:ext>
+              </a:extLst>
+            </p:cNvPr>
+            <p:cNvPicPr>
+              <a:picLocks noChangeAspect="1"/>
+            </p:cNvPicPr>
+            <p:nvPr/>
+          </p:nvPicPr>
+          <p:blipFill>
+            <a:blip r:embed="rId2"/>
+            <a:stretch>
+              <a:fillRect/>
+            </a:stretch>
+          </p:blipFill>
+          <p:spPr>
+            <a:xfrm>
+              <a:off x="3081486" y="2746566"/>
+              <a:ext cx="974922" cy="1371600"/>
+            </a:xfrm>
+            <a:prstGeom prst="rect">
+              <a:avLst/>
+            </a:prstGeom>
+          </p:spPr>
+        </p:pic>
+        <p:pic>
+          <p:nvPicPr>
+            <p:cNvPr id="41" name="Picture 40" descr="A white rectangular object with a black border&#10;&#10;Description automatically generated">
+              <a:extLst>
+                <a:ext uri="{FF2B5EF4-FFF2-40B4-BE49-F238E27FC236}">
+                  <a16:creationId xmlns:a16="http://schemas.microsoft.com/office/drawing/2014/main" id="{54075792-6881-87FE-FB16-D1F46343D912}"/>
+                </a:ext>
+              </a:extLst>
+            </p:cNvPr>
+            <p:cNvPicPr>
+              <a:picLocks noChangeAspect="1"/>
+            </p:cNvPicPr>
+            <p:nvPr/>
+          </p:nvPicPr>
+          <p:blipFill>
+            <a:blip r:embed="rId2"/>
+            <a:stretch>
+              <a:fillRect/>
+            </a:stretch>
+          </p:blipFill>
+          <p:spPr>
+            <a:xfrm>
+              <a:off x="4051286" y="2746566"/>
+              <a:ext cx="974922" cy="1371600"/>
+            </a:xfrm>
+            <a:prstGeom prst="rect">
+              <a:avLst/>
+            </a:prstGeom>
+          </p:spPr>
+        </p:pic>
+        <p:pic>
+          <p:nvPicPr>
+            <p:cNvPr id="42" name="Picture 41" descr="A white rectangular object with a black border&#10;&#10;Description automatically generated">
+              <a:extLst>
+                <a:ext uri="{FF2B5EF4-FFF2-40B4-BE49-F238E27FC236}">
+                  <a16:creationId xmlns:a16="http://schemas.microsoft.com/office/drawing/2014/main" id="{1D3B30C5-90EB-B10A-C551-ABA16AC9F99F}"/>
+                </a:ext>
+              </a:extLst>
+            </p:cNvPr>
+            <p:cNvPicPr>
+              <a:picLocks noChangeAspect="1"/>
+            </p:cNvPicPr>
+            <p:nvPr/>
+          </p:nvPicPr>
+          <p:blipFill>
+            <a:blip r:embed="rId2"/>
+            <a:stretch>
+              <a:fillRect/>
+            </a:stretch>
+          </p:blipFill>
+          <p:spPr>
+            <a:xfrm>
+              <a:off x="5051901" y="2746566"/>
+              <a:ext cx="974922" cy="1371600"/>
+            </a:xfrm>
+            <a:prstGeom prst="rect">
+              <a:avLst/>
+            </a:prstGeom>
+          </p:spPr>
+        </p:pic>
+        <p:pic>
+          <p:nvPicPr>
+            <p:cNvPr id="43" name="Picture 42" descr="A white rectangular object with a black border&#10;&#10;Description automatically generated">
+              <a:extLst>
+                <a:ext uri="{FF2B5EF4-FFF2-40B4-BE49-F238E27FC236}">
+                  <a16:creationId xmlns:a16="http://schemas.microsoft.com/office/drawing/2014/main" id="{BD4F81D1-75A2-4473-6840-5F910F1A2114}"/>
+                </a:ext>
+              </a:extLst>
+            </p:cNvPr>
+            <p:cNvPicPr>
+              <a:picLocks noChangeAspect="1"/>
+            </p:cNvPicPr>
+            <p:nvPr/>
+          </p:nvPicPr>
+          <p:blipFill>
+            <a:blip r:embed="rId2"/>
+            <a:stretch>
+              <a:fillRect/>
+            </a:stretch>
+          </p:blipFill>
+          <p:spPr>
+            <a:xfrm>
+              <a:off x="1088970" y="5415207"/>
+              <a:ext cx="974922" cy="1371600"/>
+            </a:xfrm>
+            <a:prstGeom prst="rect">
+              <a:avLst/>
+            </a:prstGeom>
+          </p:spPr>
+        </p:pic>
+        <p:pic>
+          <p:nvPicPr>
+            <p:cNvPr id="44" name="Picture 43" descr="A white rectangular object with a black border&#10;&#10;Description automatically generated">
+              <a:extLst>
+                <a:ext uri="{FF2B5EF4-FFF2-40B4-BE49-F238E27FC236}">
+                  <a16:creationId xmlns:a16="http://schemas.microsoft.com/office/drawing/2014/main" id="{B2533CC2-A89D-6130-CE09-2044498D751B}"/>
+                </a:ext>
+              </a:extLst>
+            </p:cNvPr>
+            <p:cNvPicPr>
+              <a:picLocks noChangeAspect="1"/>
+            </p:cNvPicPr>
+            <p:nvPr/>
+          </p:nvPicPr>
+          <p:blipFill>
+            <a:blip r:embed="rId2"/>
+            <a:stretch>
+              <a:fillRect/>
+            </a:stretch>
+          </p:blipFill>
+          <p:spPr>
+            <a:xfrm>
+              <a:off x="2084693" y="5415207"/>
+              <a:ext cx="974922" cy="1371600"/>
+            </a:xfrm>
+            <a:prstGeom prst="rect">
+              <a:avLst/>
+            </a:prstGeom>
+          </p:spPr>
+        </p:pic>
+        <p:pic>
+          <p:nvPicPr>
+            <p:cNvPr id="45" name="Picture 44" descr="A white rectangular object with a black border&#10;&#10;Description automatically generated">
+              <a:extLst>
+                <a:ext uri="{FF2B5EF4-FFF2-40B4-BE49-F238E27FC236}">
+                  <a16:creationId xmlns:a16="http://schemas.microsoft.com/office/drawing/2014/main" id="{E122401E-12F4-EF26-BC6C-E1386BDDB14E}"/>
+                </a:ext>
+              </a:extLst>
+            </p:cNvPr>
+            <p:cNvPicPr>
+              <a:picLocks noChangeAspect="1"/>
+            </p:cNvPicPr>
+            <p:nvPr/>
+          </p:nvPicPr>
+          <p:blipFill>
+            <a:blip r:embed="rId2"/>
+            <a:stretch>
+              <a:fillRect/>
+            </a:stretch>
+          </p:blipFill>
+          <p:spPr>
+            <a:xfrm>
+              <a:off x="3081486" y="5415207"/>
+              <a:ext cx="974922" cy="1371600"/>
+            </a:xfrm>
+            <a:prstGeom prst="rect">
+              <a:avLst/>
+            </a:prstGeom>
+          </p:spPr>
+        </p:pic>
+        <p:pic>
+          <p:nvPicPr>
+            <p:cNvPr id="46" name="Picture 45" descr="A white rectangular object with a black border&#10;&#10;Description automatically generated">
+              <a:extLst>
+                <a:ext uri="{FF2B5EF4-FFF2-40B4-BE49-F238E27FC236}">
+                  <a16:creationId xmlns:a16="http://schemas.microsoft.com/office/drawing/2014/main" id="{B45906FA-7ED8-33DB-C851-260D1103DEDA}"/>
+                </a:ext>
+              </a:extLst>
+            </p:cNvPr>
+            <p:cNvPicPr>
+              <a:picLocks noChangeAspect="1"/>
+            </p:cNvPicPr>
+            <p:nvPr/>
+          </p:nvPicPr>
+          <p:blipFill>
+            <a:blip r:embed="rId2"/>
+            <a:stretch>
+              <a:fillRect/>
+            </a:stretch>
+          </p:blipFill>
+          <p:spPr>
+            <a:xfrm>
+              <a:off x="2084693" y="4081095"/>
+              <a:ext cx="974922" cy="1371600"/>
+            </a:xfrm>
+            <a:prstGeom prst="rect">
+              <a:avLst/>
+            </a:prstGeom>
+          </p:spPr>
+        </p:pic>
+        <p:pic>
+          <p:nvPicPr>
+            <p:cNvPr id="47" name="Picture 46" descr="A white rectangular object with a black border&#10;&#10;Description automatically generated">
+              <a:extLst>
+                <a:ext uri="{FF2B5EF4-FFF2-40B4-BE49-F238E27FC236}">
+                  <a16:creationId xmlns:a16="http://schemas.microsoft.com/office/drawing/2014/main" id="{72A0051B-175F-EF27-8B47-02EE5D3037BC}"/>
+                </a:ext>
+              </a:extLst>
+            </p:cNvPr>
+            <p:cNvPicPr>
+              <a:picLocks noChangeAspect="1"/>
+            </p:cNvPicPr>
+            <p:nvPr/>
+          </p:nvPicPr>
+          <p:blipFill>
+            <a:blip r:embed="rId2"/>
+            <a:stretch>
+              <a:fillRect/>
+            </a:stretch>
+          </p:blipFill>
+          <p:spPr>
+            <a:xfrm>
+              <a:off x="3081486" y="4081095"/>
+              <a:ext cx="974922" cy="1371600"/>
+            </a:xfrm>
+            <a:prstGeom prst="rect">
+              <a:avLst/>
+            </a:prstGeom>
+          </p:spPr>
+        </p:pic>
+        <p:pic>
+          <p:nvPicPr>
+            <p:cNvPr id="48" name="Picture 47" descr="A white rectangular object with a black border&#10;&#10;Description automatically generated">
+              <a:extLst>
+                <a:ext uri="{FF2B5EF4-FFF2-40B4-BE49-F238E27FC236}">
+                  <a16:creationId xmlns:a16="http://schemas.microsoft.com/office/drawing/2014/main" id="{2BB698D2-C75F-6A59-B7C7-3A0F2785ECF2}"/>
+                </a:ext>
+              </a:extLst>
+            </p:cNvPr>
+            <p:cNvPicPr>
+              <a:picLocks noChangeAspect="1"/>
+            </p:cNvPicPr>
+            <p:nvPr/>
+          </p:nvPicPr>
+          <p:blipFill>
+            <a:blip r:embed="rId2"/>
+            <a:stretch>
+              <a:fillRect/>
+            </a:stretch>
+          </p:blipFill>
+          <p:spPr>
+            <a:xfrm>
+              <a:off x="1088970" y="2746566"/>
+              <a:ext cx="974922" cy="1371600"/>
+            </a:xfrm>
+            <a:prstGeom prst="rect">
+              <a:avLst/>
+            </a:prstGeom>
+          </p:spPr>
+        </p:pic>
+        <p:pic>
+          <p:nvPicPr>
+            <p:cNvPr id="49" name="Picture 48" descr="A white rectangular object with a black border&#10;&#10;Description automatically generated">
+              <a:extLst>
+                <a:ext uri="{FF2B5EF4-FFF2-40B4-BE49-F238E27FC236}">
+                  <a16:creationId xmlns:a16="http://schemas.microsoft.com/office/drawing/2014/main" id="{CAD759E1-EAC6-0ED0-B804-0DA9B313CEA8}"/>
+                </a:ext>
+              </a:extLst>
+            </p:cNvPr>
+            <p:cNvPicPr>
+              <a:picLocks noChangeAspect="1"/>
+            </p:cNvPicPr>
+            <p:nvPr/>
+          </p:nvPicPr>
+          <p:blipFill>
+            <a:blip r:embed="rId2"/>
+            <a:stretch>
+              <a:fillRect/>
+            </a:stretch>
+          </p:blipFill>
+          <p:spPr>
+            <a:xfrm>
+              <a:off x="2084693" y="2746566"/>
+              <a:ext cx="974922" cy="1371600"/>
+            </a:xfrm>
+            <a:prstGeom prst="rect">
+              <a:avLst/>
+            </a:prstGeom>
+          </p:spPr>
+        </p:pic>
+        <p:pic>
+          <p:nvPicPr>
+            <p:cNvPr id="50" name="Picture 49" descr="A white rectangular object with a black border&#10;&#10;Description automatically generated">
+              <a:extLst>
+                <a:ext uri="{FF2B5EF4-FFF2-40B4-BE49-F238E27FC236}">
+                  <a16:creationId xmlns:a16="http://schemas.microsoft.com/office/drawing/2014/main" id="{36D8BBF2-71BE-80A7-E818-A640D1147FBA}"/>
+                </a:ext>
+              </a:extLst>
+            </p:cNvPr>
+            <p:cNvPicPr>
+              <a:picLocks noChangeAspect="1"/>
+            </p:cNvPicPr>
+            <p:nvPr/>
+          </p:nvPicPr>
+          <p:blipFill>
+            <a:blip r:embed="rId2"/>
+            <a:stretch>
+              <a:fillRect/>
+            </a:stretch>
+          </p:blipFill>
+          <p:spPr>
+            <a:xfrm>
+              <a:off x="1088970" y="1400846"/>
+              <a:ext cx="974922" cy="1371600"/>
+            </a:xfrm>
+            <a:prstGeom prst="rect">
+              <a:avLst/>
+            </a:prstGeom>
+          </p:spPr>
+        </p:pic>
+        <p:pic>
+          <p:nvPicPr>
+            <p:cNvPr id="51" name="Picture 50" descr="A white rectangular object with a black border&#10;&#10;Description automatically generated">
+              <a:extLst>
+                <a:ext uri="{FF2B5EF4-FFF2-40B4-BE49-F238E27FC236}">
+                  <a16:creationId xmlns:a16="http://schemas.microsoft.com/office/drawing/2014/main" id="{01EABBA0-5F24-B638-4022-3FD832735F3A}"/>
+                </a:ext>
+              </a:extLst>
+            </p:cNvPr>
+            <p:cNvPicPr>
+              <a:picLocks noChangeAspect="1"/>
+            </p:cNvPicPr>
+            <p:nvPr/>
+          </p:nvPicPr>
+          <p:blipFill>
+            <a:blip r:embed="rId2"/>
+            <a:stretch>
+              <a:fillRect/>
+            </a:stretch>
+          </p:blipFill>
+          <p:spPr>
+            <a:xfrm>
+              <a:off x="2084693" y="1400846"/>
+              <a:ext cx="974922" cy="1371600"/>
+            </a:xfrm>
+            <a:prstGeom prst="rect">
+              <a:avLst/>
+            </a:prstGeom>
+          </p:spPr>
+        </p:pic>
+        <p:pic>
+          <p:nvPicPr>
+            <p:cNvPr id="52" name="Picture 51" descr="A white rectangular object with a black border&#10;&#10;Description automatically generated">
+              <a:extLst>
+                <a:ext uri="{FF2B5EF4-FFF2-40B4-BE49-F238E27FC236}">
+                  <a16:creationId xmlns:a16="http://schemas.microsoft.com/office/drawing/2014/main" id="{6122CC98-1D0D-F46A-E3EC-5747A84AF87D}"/>
+                </a:ext>
+              </a:extLst>
+            </p:cNvPr>
+            <p:cNvPicPr>
+              <a:picLocks noChangeAspect="1"/>
+            </p:cNvPicPr>
+            <p:nvPr/>
+          </p:nvPicPr>
+          <p:blipFill>
+            <a:blip r:embed="rId2"/>
+            <a:stretch>
+              <a:fillRect/>
+            </a:stretch>
+          </p:blipFill>
+          <p:spPr>
+            <a:xfrm>
+              <a:off x="4051286" y="1400846"/>
+              <a:ext cx="974922" cy="1371600"/>
+            </a:xfrm>
+            <a:prstGeom prst="rect">
+              <a:avLst/>
+            </a:prstGeom>
+          </p:spPr>
+        </p:pic>
+        <p:pic>
+          <p:nvPicPr>
+            <p:cNvPr id="53" name="Picture 52" descr="A white rectangular object with a black border&#10;&#10;Description automatically generated">
+              <a:extLst>
+                <a:ext uri="{FF2B5EF4-FFF2-40B4-BE49-F238E27FC236}">
+                  <a16:creationId xmlns:a16="http://schemas.microsoft.com/office/drawing/2014/main" id="{DDB7B03A-0ACA-D85C-0F06-EE1517958610}"/>
+                </a:ext>
+              </a:extLst>
+            </p:cNvPr>
+            <p:cNvPicPr>
+              <a:picLocks noChangeAspect="1"/>
+            </p:cNvPicPr>
+            <p:nvPr/>
+          </p:nvPicPr>
+          <p:blipFill>
+            <a:blip r:embed="rId2"/>
+            <a:stretch>
+              <a:fillRect/>
+            </a:stretch>
+          </p:blipFill>
+          <p:spPr>
+            <a:xfrm>
+              <a:off x="5051901" y="1400846"/>
+              <a:ext cx="974922" cy="1371600"/>
+            </a:xfrm>
+            <a:prstGeom prst="rect">
+              <a:avLst/>
+            </a:prstGeom>
+          </p:spPr>
+        </p:pic>
+      </p:grpSp>
+      <p:sp>
+        <p:nvSpPr>
+          <p:cNvPr id="3" name="Rectangle 2">
+            <a:extLst>
+              <a:ext uri="{FF2B5EF4-FFF2-40B4-BE49-F238E27FC236}">
+                <a16:creationId xmlns:a16="http://schemas.microsoft.com/office/drawing/2014/main" id="{0934C757-E609-6CD9-658E-C8CC7F2FB3CA}"/>
+              </a:ext>
+            </a:extLst>
+          </p:cNvPr>
+          <p:cNvSpPr/>
+          <p:nvPr/>
+        </p:nvSpPr>
+        <p:spPr>
+          <a:xfrm>
+            <a:off x="-77821" y="-291829"/>
+            <a:ext cx="12451404" cy="7247106"/>
+          </a:xfrm>
+          <a:prstGeom prst="rect">
+            <a:avLst/>
+          </a:prstGeom>
+          <a:solidFill>
+            <a:schemeClr val="bg2">
+              <a:lumMod val="10000"/>
+              <a:alpha val="69946"/>
+            </a:schemeClr>
+          </a:solidFill>
+          <a:ln>
+            <a:noFill/>
+          </a:ln>
+        </p:spPr>
+        <p:style>
+          <a:lnRef idx="2">
+            <a:schemeClr val="accent1">
+              <a:shade val="15000"/>
+            </a:schemeClr>
+          </a:lnRef>
+          <a:fillRef idx="1">
+            <a:schemeClr val="accent1"/>
+          </a:fillRef>
+          <a:effectRef idx="0">
+            <a:schemeClr val="accent1"/>
+          </a:effectRef>
+          <a:fontRef idx="minor">
+            <a:schemeClr val="lt1"/>
+          </a:fontRef>
+        </p:style>
+        <p:txBody>
+          <a:bodyPr rtlCol="0" anchor="ctr"/>
+          <a:lstStyle/>
+          <a:p>
+            <a:pPr algn="ctr"/>
+            <a:endParaRPr lang="en-US" dirty="0"/>
+          </a:p>
+        </p:txBody>
+      </p:sp>
+      <p:grpSp>
+        <p:nvGrpSpPr>
+          <p:cNvPr id="5" name="Group 4">
+            <a:extLst>
+              <a:ext uri="{FF2B5EF4-FFF2-40B4-BE49-F238E27FC236}">
+                <a16:creationId xmlns:a16="http://schemas.microsoft.com/office/drawing/2014/main" id="{C79A578D-6897-17FC-C0A8-63968B8E3CA1}"/>
+              </a:ext>
+            </a:extLst>
+          </p:cNvPr>
+          <p:cNvGrpSpPr/>
+          <p:nvPr/>
+        </p:nvGrpSpPr>
+        <p:grpSpPr>
+          <a:xfrm>
+            <a:off x="3078729" y="1405305"/>
+            <a:ext cx="4923627" cy="5381502"/>
+            <a:chOff x="3078729" y="1405305"/>
+            <a:chExt cx="4923627" cy="5381502"/>
+          </a:xfrm>
+        </p:grpSpPr>
+        <p:pic>
+          <p:nvPicPr>
+            <p:cNvPr id="55" name="Picture 54" descr="A yellow star on a white background&#10;&#10;Description automatically generated">
+              <a:extLst>
+                <a:ext uri="{FF2B5EF4-FFF2-40B4-BE49-F238E27FC236}">
+                  <a16:creationId xmlns:a16="http://schemas.microsoft.com/office/drawing/2014/main" id="{1145710D-3438-934E-0B7A-57B298193D0E}"/>
+                </a:ext>
+              </a:extLst>
+            </p:cNvPr>
+            <p:cNvPicPr>
+              <a:picLocks noChangeAspect="1"/>
+            </p:cNvPicPr>
+            <p:nvPr/>
+          </p:nvPicPr>
+          <p:blipFill>
+            <a:blip r:embed="rId3"/>
+            <a:stretch>
+              <a:fillRect/>
+            </a:stretch>
+          </p:blipFill>
+          <p:spPr>
+            <a:xfrm>
+              <a:off x="3078729" y="1405305"/>
+              <a:ext cx="974922" cy="1371600"/>
+            </a:xfrm>
+            <a:prstGeom prst="rect">
+              <a:avLst/>
+            </a:prstGeom>
+          </p:spPr>
+        </p:pic>
+        <p:pic>
+          <p:nvPicPr>
+            <p:cNvPr id="56" name="Picture 55" descr="A yellow star on a white background&#10;&#10;Description automatically generated">
+              <a:extLst>
+                <a:ext uri="{FF2B5EF4-FFF2-40B4-BE49-F238E27FC236}">
+                  <a16:creationId xmlns:a16="http://schemas.microsoft.com/office/drawing/2014/main" id="{93E61B35-DCD1-F48B-93D6-026D1BC4133B}"/>
+                </a:ext>
+              </a:extLst>
+            </p:cNvPr>
+            <p:cNvPicPr>
+              <a:picLocks noChangeAspect="1"/>
+            </p:cNvPicPr>
+            <p:nvPr/>
+          </p:nvPicPr>
+          <p:blipFill>
+            <a:blip r:embed="rId3"/>
+            <a:stretch>
+              <a:fillRect/>
+            </a:stretch>
+          </p:blipFill>
+          <p:spPr>
+            <a:xfrm>
+              <a:off x="6038288" y="2772446"/>
+              <a:ext cx="974922" cy="1371600"/>
+            </a:xfrm>
+            <a:prstGeom prst="rect">
+              <a:avLst/>
+            </a:prstGeom>
+          </p:spPr>
+        </p:pic>
+        <p:pic>
+          <p:nvPicPr>
+            <p:cNvPr id="57" name="Picture 56" descr="A yellow star on a white background&#10;&#10;Description automatically generated">
+              <a:extLst>
+                <a:ext uri="{FF2B5EF4-FFF2-40B4-BE49-F238E27FC236}">
+                  <a16:creationId xmlns:a16="http://schemas.microsoft.com/office/drawing/2014/main" id="{C38E4655-E79D-9F74-72F3-D6CAC8F849E9}"/>
+                </a:ext>
+              </a:extLst>
+            </p:cNvPr>
+            <p:cNvPicPr>
+              <a:picLocks noChangeAspect="1"/>
+            </p:cNvPicPr>
+            <p:nvPr/>
+          </p:nvPicPr>
+          <p:blipFill>
+            <a:blip r:embed="rId3"/>
+            <a:stretch>
+              <a:fillRect/>
+            </a:stretch>
+          </p:blipFill>
+          <p:spPr>
+            <a:xfrm>
+              <a:off x="7027434" y="5415207"/>
+              <a:ext cx="974922" cy="1371600"/>
+            </a:xfrm>
+            <a:prstGeom prst="rect">
+              <a:avLst/>
+            </a:prstGeom>
+          </p:spPr>
+        </p:pic>
+      </p:grpSp>
+    </p:spTree>
+    <p:extLst>
+      <p:ext uri="{BB962C8B-B14F-4D97-AF65-F5344CB8AC3E}">
+        <p14:creationId xmlns:p14="http://schemas.microsoft.com/office/powerpoint/2010/main" val="3057485994"/>
+      </p:ext>
+    </p:extLst>
+  </p:cSld>
+  <p:clrMapOvr>
+    <a:masterClrMapping/>
+  </p:clrMapOvr>
+</p:sld>
+</file>
+
+<file path=ppt/slides/slide12.xml><?xml version="1.0" encoding="utf-8"?>
+<p:sld xmlns:a="http://schemas.openxmlformats.org/drawingml/2006/main" xmlns:r="http://schemas.openxmlformats.org/officeDocument/2006/relationships" xmlns:p="http://schemas.openxmlformats.org/presentationml/2006/main">
+  <p:cSld>
+    <p:spTree>
+      <p:nvGrpSpPr>
+        <p:cNvPr id="1" name="">
+          <a:extLst>
+            <a:ext uri="{FF2B5EF4-FFF2-40B4-BE49-F238E27FC236}">
+              <a16:creationId xmlns:a16="http://schemas.microsoft.com/office/drawing/2014/main" id="{85E81E0E-9C3B-4693-F2F7-EB5B610C8BB9}"/>
+            </a:ext>
+          </a:extLst>
+        </p:cNvPr>
+        <p:cNvGrpSpPr/>
+        <p:nvPr/>
+      </p:nvGrpSpPr>
+      <p:grpSpPr>
+        <a:xfrm>
+          <a:off x="0" y="0"/>
+          <a:ext cx="0" cy="0"/>
+          <a:chOff x="0" y="0"/>
+          <a:chExt cx="0" cy="0"/>
+        </a:xfrm>
+      </p:grpSpPr>
+      <p:grpSp>
+        <p:nvGrpSpPr>
+          <p:cNvPr id="58" name="Group 57">
+            <a:extLst>
+              <a:ext uri="{FF2B5EF4-FFF2-40B4-BE49-F238E27FC236}">
+                <a16:creationId xmlns:a16="http://schemas.microsoft.com/office/drawing/2014/main" id="{4F0B7CDE-8349-A7D0-38E3-4D95C8C9FE30}"/>
+              </a:ext>
+            </a:extLst>
+          </p:cNvPr>
+          <p:cNvGrpSpPr/>
+          <p:nvPr/>
+        </p:nvGrpSpPr>
+        <p:grpSpPr>
+          <a:xfrm>
+            <a:off x="1088970" y="47704"/>
+            <a:ext cx="9895047" cy="6739103"/>
+            <a:chOff x="1088970" y="47704"/>
+            <a:chExt cx="9895047" cy="6739103"/>
+          </a:xfrm>
+        </p:grpSpPr>
+        <p:grpSp>
+          <p:nvGrpSpPr>
+            <p:cNvPr id="54" name="Group 53">
+              <a:extLst>
+                <a:ext uri="{FF2B5EF4-FFF2-40B4-BE49-F238E27FC236}">
+                  <a16:creationId xmlns:a16="http://schemas.microsoft.com/office/drawing/2014/main" id="{A79469E1-D15B-317A-79E2-CC0088786EBA}"/>
+                </a:ext>
+              </a:extLst>
+            </p:cNvPr>
+            <p:cNvGrpSpPr/>
+            <p:nvPr/>
+          </p:nvGrpSpPr>
+          <p:grpSpPr>
+            <a:xfrm>
+              <a:off x="1088970" y="47704"/>
+              <a:ext cx="9895047" cy="6739103"/>
+              <a:chOff x="1088970" y="47704"/>
+              <a:chExt cx="9895047" cy="6739103"/>
+            </a:xfrm>
+          </p:grpSpPr>
+          <p:pic>
+            <p:nvPicPr>
+              <p:cNvPr id="2" name="Picture 1" descr="A white rectangular object with a black border&#10;&#10;Description automatically generated">
+                <a:extLst>
+                  <a:ext uri="{FF2B5EF4-FFF2-40B4-BE49-F238E27FC236}">
+                    <a16:creationId xmlns:a16="http://schemas.microsoft.com/office/drawing/2014/main" id="{3BD7D743-7786-7148-4867-92E3A7755ECF}"/>
+                  </a:ext>
+                </a:extLst>
+              </p:cNvPr>
+              <p:cNvPicPr>
+                <a:picLocks noChangeAspect="1"/>
+              </p:cNvPicPr>
+              <p:nvPr/>
+            </p:nvPicPr>
+            <p:blipFill>
+              <a:blip r:embed="rId2"/>
+              <a:stretch>
+                <a:fillRect/>
+              </a:stretch>
+            </p:blipFill>
+            <p:spPr>
+              <a:xfrm>
+                <a:off x="2084693" y="47704"/>
+                <a:ext cx="974922" cy="1371600"/>
+              </a:xfrm>
+              <a:prstGeom prst="rect">
+                <a:avLst/>
+              </a:prstGeom>
+            </p:spPr>
+          </p:pic>
+          <p:pic>
+            <p:nvPicPr>
+              <p:cNvPr id="4" name="Picture 3" descr="A white rectangular object with a black border&#10;&#10;Description automatically generated">
+                <a:extLst>
+                  <a:ext uri="{FF2B5EF4-FFF2-40B4-BE49-F238E27FC236}">
+                    <a16:creationId xmlns:a16="http://schemas.microsoft.com/office/drawing/2014/main" id="{B1A9D90F-2C62-34C5-0C1E-79756233B151}"/>
+                  </a:ext>
+                </a:extLst>
+              </p:cNvPr>
+              <p:cNvPicPr>
+                <a:picLocks noChangeAspect="1"/>
+              </p:cNvPicPr>
+              <p:nvPr/>
+            </p:nvPicPr>
+            <p:blipFill>
+              <a:blip r:embed="rId2"/>
+              <a:stretch>
+                <a:fillRect/>
+              </a:stretch>
+            </p:blipFill>
+            <p:spPr>
+              <a:xfrm>
+                <a:off x="1088970" y="4081095"/>
+                <a:ext cx="974922" cy="1371600"/>
+              </a:xfrm>
+              <a:prstGeom prst="rect">
+                <a:avLst/>
+              </a:prstGeom>
+            </p:spPr>
+          </p:pic>
+          <p:pic>
+            <p:nvPicPr>
+              <p:cNvPr id="17" name="Picture 16" descr="A white rectangular object with a black border&#10;&#10;Description automatically generated">
+                <a:extLst>
+                  <a:ext uri="{FF2B5EF4-FFF2-40B4-BE49-F238E27FC236}">
+                    <a16:creationId xmlns:a16="http://schemas.microsoft.com/office/drawing/2014/main" id="{54B33AAA-BA51-D0CA-7DB5-73CF908139EE}"/>
+                  </a:ext>
+                </a:extLst>
+              </p:cNvPr>
+              <p:cNvPicPr>
+                <a:picLocks noChangeAspect="1"/>
+              </p:cNvPicPr>
+              <p:nvPr/>
+            </p:nvPicPr>
+            <p:blipFill>
+              <a:blip r:embed="rId2"/>
+              <a:stretch>
+                <a:fillRect/>
+              </a:stretch>
+            </p:blipFill>
+            <p:spPr>
+              <a:xfrm>
+                <a:off x="1088970" y="47704"/>
+                <a:ext cx="974922" cy="1371600"/>
+              </a:xfrm>
+              <a:prstGeom prst="rect">
+                <a:avLst/>
+              </a:prstGeom>
+            </p:spPr>
+          </p:pic>
+          <p:pic>
+            <p:nvPicPr>
+              <p:cNvPr id="18" name="Picture 17" descr="A white rectangular object with a black border&#10;&#10;Description automatically generated">
+                <a:extLst>
+                  <a:ext uri="{FF2B5EF4-FFF2-40B4-BE49-F238E27FC236}">
+                    <a16:creationId xmlns:a16="http://schemas.microsoft.com/office/drawing/2014/main" id="{F81CF62B-0D1E-CA3D-0C1C-17A14BC2C48D}"/>
+                  </a:ext>
+                </a:extLst>
+              </p:cNvPr>
+              <p:cNvPicPr>
+                <a:picLocks noChangeAspect="1"/>
+              </p:cNvPicPr>
+              <p:nvPr/>
+            </p:nvPicPr>
+            <p:blipFill>
+              <a:blip r:embed="rId2"/>
+              <a:stretch>
+                <a:fillRect/>
+              </a:stretch>
+            </p:blipFill>
+            <p:spPr>
+              <a:xfrm>
+                <a:off x="4051286" y="47704"/>
+                <a:ext cx="974922" cy="1371600"/>
+              </a:xfrm>
+              <a:prstGeom prst="rect">
+                <a:avLst/>
+              </a:prstGeom>
+            </p:spPr>
+          </p:pic>
+          <p:pic>
+            <p:nvPicPr>
+              <p:cNvPr id="19" name="Picture 18" descr="A white rectangular object with a black border&#10;&#10;Description automatically generated">
+                <a:extLst>
+                  <a:ext uri="{FF2B5EF4-FFF2-40B4-BE49-F238E27FC236}">
+                    <a16:creationId xmlns:a16="http://schemas.microsoft.com/office/drawing/2014/main" id="{5DBF8337-46AE-A313-545F-32AD031F3277}"/>
+                  </a:ext>
+                </a:extLst>
+              </p:cNvPr>
+              <p:cNvPicPr>
+                <a:picLocks noChangeAspect="1"/>
+              </p:cNvPicPr>
+              <p:nvPr/>
+            </p:nvPicPr>
+            <p:blipFill>
+              <a:blip r:embed="rId2"/>
+              <a:stretch>
+                <a:fillRect/>
+              </a:stretch>
+            </p:blipFill>
+            <p:spPr>
+              <a:xfrm>
+                <a:off x="5051901" y="47704"/>
+                <a:ext cx="974922" cy="1371600"/>
+              </a:xfrm>
+              <a:prstGeom prst="rect">
+                <a:avLst/>
+              </a:prstGeom>
+            </p:spPr>
+          </p:pic>
+          <p:pic>
+            <p:nvPicPr>
+              <p:cNvPr id="20" name="Picture 19" descr="A white rectangular object with a black border&#10;&#10;Description automatically generated">
+                <a:extLst>
+                  <a:ext uri="{FF2B5EF4-FFF2-40B4-BE49-F238E27FC236}">
+                    <a16:creationId xmlns:a16="http://schemas.microsoft.com/office/drawing/2014/main" id="{0EABE1E6-13FE-B611-9EDD-D00625F27578}"/>
+                  </a:ext>
+                </a:extLst>
+              </p:cNvPr>
+              <p:cNvPicPr>
+                <a:picLocks noChangeAspect="1"/>
+              </p:cNvPicPr>
+              <p:nvPr/>
+            </p:nvPicPr>
+            <p:blipFill>
+              <a:blip r:embed="rId2"/>
+              <a:stretch>
+                <a:fillRect/>
+              </a:stretch>
+            </p:blipFill>
+            <p:spPr>
+              <a:xfrm>
+                <a:off x="6038290" y="47704"/>
+                <a:ext cx="974922" cy="1371600"/>
+              </a:xfrm>
+              <a:prstGeom prst="rect">
+                <a:avLst/>
+              </a:prstGeom>
+            </p:spPr>
+          </p:pic>
+          <p:pic>
+            <p:nvPicPr>
+              <p:cNvPr id="21" name="Picture 20" descr="A white rectangular object with a black border&#10;&#10;Description automatically generated">
+                <a:extLst>
+                  <a:ext uri="{FF2B5EF4-FFF2-40B4-BE49-F238E27FC236}">
+                    <a16:creationId xmlns:a16="http://schemas.microsoft.com/office/drawing/2014/main" id="{3B6F5BFE-5CE0-C342-8F5A-66089DC94502}"/>
+                  </a:ext>
+                </a:extLst>
+              </p:cNvPr>
+              <p:cNvPicPr>
+                <a:picLocks noChangeAspect="1"/>
+              </p:cNvPicPr>
+              <p:nvPr/>
+            </p:nvPicPr>
+            <p:blipFill>
+              <a:blip r:embed="rId2"/>
+              <a:stretch>
+                <a:fillRect/>
+              </a:stretch>
+            </p:blipFill>
+            <p:spPr>
+              <a:xfrm>
+                <a:off x="7041660" y="2746566"/>
+                <a:ext cx="974922" cy="1371600"/>
+              </a:xfrm>
+              <a:prstGeom prst="rect">
+                <a:avLst/>
+              </a:prstGeom>
+            </p:spPr>
+          </p:pic>
+          <p:pic>
+            <p:nvPicPr>
+              <p:cNvPr id="22" name="Picture 21" descr="A white rectangular object with a black border&#10;&#10;Description automatically generated">
+                <a:extLst>
+                  <a:ext uri="{FF2B5EF4-FFF2-40B4-BE49-F238E27FC236}">
+                    <a16:creationId xmlns:a16="http://schemas.microsoft.com/office/drawing/2014/main" id="{8885E592-BB5E-9ECC-B5DF-5D12D2E8C861}"/>
+                  </a:ext>
+                </a:extLst>
+              </p:cNvPr>
+              <p:cNvPicPr>
+                <a:picLocks noChangeAspect="1"/>
+              </p:cNvPicPr>
+              <p:nvPr/>
+            </p:nvPicPr>
+            <p:blipFill>
+              <a:blip r:embed="rId2"/>
+              <a:stretch>
+                <a:fillRect/>
+              </a:stretch>
+            </p:blipFill>
+            <p:spPr>
+              <a:xfrm>
+                <a:off x="6038290" y="1400846"/>
+                <a:ext cx="974922" cy="1371600"/>
+              </a:xfrm>
+              <a:prstGeom prst="rect">
+                <a:avLst/>
+              </a:prstGeom>
+            </p:spPr>
+          </p:pic>
+          <p:pic>
+            <p:nvPicPr>
+              <p:cNvPr id="6" name="Picture 5" descr="A white rectangular object with a black border&#10;&#10;Description automatically generated">
+                <a:extLst>
+                  <a:ext uri="{FF2B5EF4-FFF2-40B4-BE49-F238E27FC236}">
+                    <a16:creationId xmlns:a16="http://schemas.microsoft.com/office/drawing/2014/main" id="{A0F409D6-52BF-8D5B-4A5D-26E08CF5345C}"/>
+                  </a:ext>
+                </a:extLst>
+              </p:cNvPr>
+              <p:cNvPicPr>
+                <a:picLocks noChangeAspect="1"/>
+              </p:cNvPicPr>
+              <p:nvPr/>
+            </p:nvPicPr>
+            <p:blipFill>
+              <a:blip r:embed="rId2"/>
+              <a:stretch>
+                <a:fillRect/>
+              </a:stretch>
+            </p:blipFill>
+            <p:spPr>
+              <a:xfrm>
+                <a:off x="3081486" y="47704"/>
+                <a:ext cx="974922" cy="1371600"/>
+              </a:xfrm>
+              <a:prstGeom prst="rect">
+                <a:avLst/>
+              </a:prstGeom>
+            </p:spPr>
+          </p:pic>
+          <p:pic>
+            <p:nvPicPr>
+              <p:cNvPr id="8" name="Picture 7" descr="A white rectangular object with a black border&#10;&#10;Description automatically generated">
+                <a:extLst>
+                  <a:ext uri="{FF2B5EF4-FFF2-40B4-BE49-F238E27FC236}">
+                    <a16:creationId xmlns:a16="http://schemas.microsoft.com/office/drawing/2014/main" id="{C2A964A5-C369-F3D3-571A-AFF806A00364}"/>
+                  </a:ext>
+                </a:extLst>
+              </p:cNvPr>
+              <p:cNvPicPr>
+                <a:picLocks noChangeAspect="1"/>
+              </p:cNvPicPr>
+              <p:nvPr/>
+            </p:nvPicPr>
+            <p:blipFill>
+              <a:blip r:embed="rId2"/>
+              <a:stretch>
+                <a:fillRect/>
+              </a:stretch>
+            </p:blipFill>
+            <p:spPr>
+              <a:xfrm>
+                <a:off x="7041660" y="1400846"/>
+                <a:ext cx="974922" cy="1371600"/>
+              </a:xfrm>
+              <a:prstGeom prst="rect">
+                <a:avLst/>
+              </a:prstGeom>
+            </p:spPr>
+          </p:pic>
+          <p:pic>
+            <p:nvPicPr>
+              <p:cNvPr id="9" name="Picture 8" descr="A white rectangular object with a black border&#10;&#10;Description automatically generated">
+                <a:extLst>
+                  <a:ext uri="{FF2B5EF4-FFF2-40B4-BE49-F238E27FC236}">
+                    <a16:creationId xmlns:a16="http://schemas.microsoft.com/office/drawing/2014/main" id="{2607432A-FCDE-41A0-74A9-405852A3A4F8}"/>
+                  </a:ext>
+                </a:extLst>
+              </p:cNvPr>
+              <p:cNvPicPr>
+                <a:picLocks noChangeAspect="1"/>
+              </p:cNvPicPr>
+              <p:nvPr/>
+            </p:nvPicPr>
+            <p:blipFill>
+              <a:blip r:embed="rId2"/>
+              <a:stretch>
+                <a:fillRect/>
+              </a:stretch>
+            </p:blipFill>
+            <p:spPr>
+              <a:xfrm>
+                <a:off x="7041660" y="47704"/>
+                <a:ext cx="974922" cy="1371600"/>
+              </a:xfrm>
+              <a:prstGeom prst="rect">
+                <a:avLst/>
+              </a:prstGeom>
+            </p:spPr>
+          </p:pic>
+          <p:pic>
+            <p:nvPicPr>
+              <p:cNvPr id="11" name="Picture 10" descr="A white rectangular object with a black border&#10;&#10;Description automatically generated">
+                <a:extLst>
+                  <a:ext uri="{FF2B5EF4-FFF2-40B4-BE49-F238E27FC236}">
+                    <a16:creationId xmlns:a16="http://schemas.microsoft.com/office/drawing/2014/main" id="{44365150-6583-883B-014A-A15985181B84}"/>
+                  </a:ext>
+                </a:extLst>
+              </p:cNvPr>
+              <p:cNvPicPr>
+                <a:picLocks noChangeAspect="1"/>
+              </p:cNvPicPr>
+              <p:nvPr/>
+            </p:nvPicPr>
+            <p:blipFill>
+              <a:blip r:embed="rId2"/>
+              <a:stretch>
+                <a:fillRect/>
+              </a:stretch>
+            </p:blipFill>
+            <p:spPr>
+              <a:xfrm>
+                <a:off x="7041660" y="4081095"/>
+                <a:ext cx="974922" cy="1371600"/>
+              </a:xfrm>
+              <a:prstGeom prst="rect">
+                <a:avLst/>
+              </a:prstGeom>
+            </p:spPr>
+          </p:pic>
+          <p:pic>
+            <p:nvPicPr>
+              <p:cNvPr id="12" name="Picture 11" descr="A white rectangular object with a black border&#10;&#10;Description automatically generated">
+                <a:extLst>
+                  <a:ext uri="{FF2B5EF4-FFF2-40B4-BE49-F238E27FC236}">
+                    <a16:creationId xmlns:a16="http://schemas.microsoft.com/office/drawing/2014/main" id="{D99F6C99-F9A3-51A0-D425-4125BC328B90}"/>
+                  </a:ext>
+                </a:extLst>
+              </p:cNvPr>
+              <p:cNvPicPr>
+                <a:picLocks noChangeAspect="1"/>
+              </p:cNvPicPr>
+              <p:nvPr/>
+            </p:nvPicPr>
+            <p:blipFill>
+              <a:blip r:embed="rId2"/>
+              <a:stretch>
+                <a:fillRect/>
+              </a:stretch>
+            </p:blipFill>
+            <p:spPr>
+              <a:xfrm>
+                <a:off x="8002356" y="4081095"/>
+                <a:ext cx="974922" cy="1371600"/>
+              </a:xfrm>
+              <a:prstGeom prst="rect">
+                <a:avLst/>
+              </a:prstGeom>
+            </p:spPr>
+          </p:pic>
+          <p:pic>
+            <p:nvPicPr>
+              <p:cNvPr id="13" name="Picture 12" descr="A white rectangular object with a black border&#10;&#10;Description automatically generated">
+                <a:extLst>
+                  <a:ext uri="{FF2B5EF4-FFF2-40B4-BE49-F238E27FC236}">
+                    <a16:creationId xmlns:a16="http://schemas.microsoft.com/office/drawing/2014/main" id="{FAE28FC6-F6CD-3ACE-F80B-D7CB42FF4C56}"/>
+                  </a:ext>
+                </a:extLst>
+              </p:cNvPr>
+              <p:cNvPicPr>
+                <a:picLocks noChangeAspect="1"/>
+              </p:cNvPicPr>
+              <p:nvPr/>
+            </p:nvPicPr>
+            <p:blipFill>
+              <a:blip r:embed="rId2"/>
+              <a:stretch>
+                <a:fillRect/>
+              </a:stretch>
+            </p:blipFill>
+            <p:spPr>
+              <a:xfrm>
+                <a:off x="9005728" y="4081095"/>
+                <a:ext cx="974922" cy="1371600"/>
+              </a:xfrm>
+              <a:prstGeom prst="rect">
+                <a:avLst/>
+              </a:prstGeom>
+            </p:spPr>
+          </p:pic>
+          <p:pic>
+            <p:nvPicPr>
+              <p:cNvPr id="14" name="Picture 13" descr="A white rectangular object with a black border&#10;&#10;Description automatically generated">
+                <a:extLst>
+                  <a:ext uri="{FF2B5EF4-FFF2-40B4-BE49-F238E27FC236}">
+                    <a16:creationId xmlns:a16="http://schemas.microsoft.com/office/drawing/2014/main" id="{997FE8DF-DDF5-9464-3FCF-7B7A2ED7726D}"/>
+                  </a:ext>
+                </a:extLst>
+              </p:cNvPr>
+              <p:cNvPicPr>
+                <a:picLocks noChangeAspect="1"/>
+              </p:cNvPicPr>
+              <p:nvPr/>
+            </p:nvPicPr>
+            <p:blipFill>
+              <a:blip r:embed="rId2"/>
+              <a:stretch>
+                <a:fillRect/>
+              </a:stretch>
+            </p:blipFill>
+            <p:spPr>
+              <a:xfrm>
+                <a:off x="10009095" y="4081095"/>
+                <a:ext cx="974922" cy="1371600"/>
+              </a:xfrm>
+              <a:prstGeom prst="rect">
+                <a:avLst/>
+              </a:prstGeom>
+            </p:spPr>
+          </p:pic>
+          <p:pic>
+            <p:nvPicPr>
+              <p:cNvPr id="15" name="Picture 14" descr="A white rectangular object with a black border&#10;&#10;Description automatically generated">
+                <a:extLst>
+                  <a:ext uri="{FF2B5EF4-FFF2-40B4-BE49-F238E27FC236}">
+                    <a16:creationId xmlns:a16="http://schemas.microsoft.com/office/drawing/2014/main" id="{9AEC302D-B65D-FC4A-2470-968020664EFC}"/>
+                  </a:ext>
+                </a:extLst>
+              </p:cNvPr>
+              <p:cNvPicPr>
+                <a:picLocks noChangeAspect="1"/>
+              </p:cNvPicPr>
+              <p:nvPr/>
+            </p:nvPicPr>
+            <p:blipFill>
+              <a:blip r:embed="rId2"/>
+              <a:stretch>
+                <a:fillRect/>
+              </a:stretch>
+            </p:blipFill>
+            <p:spPr>
+              <a:xfrm>
+                <a:off x="8002356" y="2746566"/>
+                <a:ext cx="974922" cy="1371600"/>
+              </a:xfrm>
+              <a:prstGeom prst="rect">
+                <a:avLst/>
+              </a:prstGeom>
+            </p:spPr>
+          </p:pic>
+          <p:pic>
+            <p:nvPicPr>
+              <p:cNvPr id="23" name="Picture 22" descr="A white rectangular object with a black border&#10;&#10;Description automatically generated">
+                <a:extLst>
+                  <a:ext uri="{FF2B5EF4-FFF2-40B4-BE49-F238E27FC236}">
+                    <a16:creationId xmlns:a16="http://schemas.microsoft.com/office/drawing/2014/main" id="{CBF04877-1266-7A7C-10F2-7E1632EB9D00}"/>
+                  </a:ext>
+                </a:extLst>
+              </p:cNvPr>
+              <p:cNvPicPr>
+                <a:picLocks noChangeAspect="1"/>
+              </p:cNvPicPr>
+              <p:nvPr/>
+            </p:nvPicPr>
+            <p:blipFill>
+              <a:blip r:embed="rId2"/>
+              <a:stretch>
+                <a:fillRect/>
+              </a:stretch>
+            </p:blipFill>
+            <p:spPr>
+              <a:xfrm>
+                <a:off x="9005728" y="2746566"/>
+                <a:ext cx="974922" cy="1371600"/>
+              </a:xfrm>
+              <a:prstGeom prst="rect">
+                <a:avLst/>
+              </a:prstGeom>
+            </p:spPr>
+          </p:pic>
+          <p:pic>
+            <p:nvPicPr>
+              <p:cNvPr id="24" name="Picture 23" descr="A white rectangular object with a black border&#10;&#10;Description automatically generated">
+                <a:extLst>
+                  <a:ext uri="{FF2B5EF4-FFF2-40B4-BE49-F238E27FC236}">
+                    <a16:creationId xmlns:a16="http://schemas.microsoft.com/office/drawing/2014/main" id="{8228AD58-3A29-6B19-50F5-0672AE7235A2}"/>
+                  </a:ext>
+                </a:extLst>
+              </p:cNvPr>
+              <p:cNvPicPr>
+                <a:picLocks noChangeAspect="1"/>
+              </p:cNvPicPr>
+              <p:nvPr/>
+            </p:nvPicPr>
+            <p:blipFill>
+              <a:blip r:embed="rId2"/>
+              <a:stretch>
+                <a:fillRect/>
+              </a:stretch>
+            </p:blipFill>
+            <p:spPr>
+              <a:xfrm>
+                <a:off x="10009095" y="2746566"/>
+                <a:ext cx="974922" cy="1371600"/>
+              </a:xfrm>
+              <a:prstGeom prst="rect">
+                <a:avLst/>
+              </a:prstGeom>
+            </p:spPr>
+          </p:pic>
+          <p:pic>
+            <p:nvPicPr>
+              <p:cNvPr id="25" name="Picture 24" descr="A white rectangular object with a black border&#10;&#10;Description automatically generated">
+                <a:extLst>
+                  <a:ext uri="{FF2B5EF4-FFF2-40B4-BE49-F238E27FC236}">
+                    <a16:creationId xmlns:a16="http://schemas.microsoft.com/office/drawing/2014/main" id="{86D3A713-F5A9-1030-8963-D892C7D62070}"/>
+                  </a:ext>
+                </a:extLst>
+              </p:cNvPr>
+              <p:cNvPicPr>
+                <a:picLocks noChangeAspect="1"/>
+              </p:cNvPicPr>
+              <p:nvPr/>
+            </p:nvPicPr>
+            <p:blipFill>
+              <a:blip r:embed="rId2"/>
+              <a:stretch>
+                <a:fillRect/>
+              </a:stretch>
+            </p:blipFill>
+            <p:spPr>
+              <a:xfrm>
+                <a:off x="8002356" y="1400846"/>
+                <a:ext cx="974922" cy="1371600"/>
+              </a:xfrm>
+              <a:prstGeom prst="rect">
+                <a:avLst/>
+              </a:prstGeom>
+            </p:spPr>
+          </p:pic>
+          <p:pic>
+            <p:nvPicPr>
+              <p:cNvPr id="26" name="Picture 25" descr="A white rectangular object with a black border&#10;&#10;Description automatically generated">
+                <a:extLst>
+                  <a:ext uri="{FF2B5EF4-FFF2-40B4-BE49-F238E27FC236}">
+                    <a16:creationId xmlns:a16="http://schemas.microsoft.com/office/drawing/2014/main" id="{005E493D-EECF-D517-6664-D9F3970C977B}"/>
+                  </a:ext>
+                </a:extLst>
+              </p:cNvPr>
+              <p:cNvPicPr>
+                <a:picLocks noChangeAspect="1"/>
+              </p:cNvPicPr>
+              <p:nvPr/>
+            </p:nvPicPr>
+            <p:blipFill>
+              <a:blip r:embed="rId2"/>
+              <a:stretch>
+                <a:fillRect/>
+              </a:stretch>
+            </p:blipFill>
+            <p:spPr>
+              <a:xfrm>
+                <a:off x="9005728" y="1400846"/>
+                <a:ext cx="974922" cy="1371600"/>
+              </a:xfrm>
+              <a:prstGeom prst="rect">
+                <a:avLst/>
+              </a:prstGeom>
+            </p:spPr>
+          </p:pic>
+          <p:pic>
+            <p:nvPicPr>
+              <p:cNvPr id="27" name="Picture 26" descr="A white rectangular object with a black border&#10;&#10;Description automatically generated">
+                <a:extLst>
+                  <a:ext uri="{FF2B5EF4-FFF2-40B4-BE49-F238E27FC236}">
+                    <a16:creationId xmlns:a16="http://schemas.microsoft.com/office/drawing/2014/main" id="{F00414EA-6A8F-5D16-D540-B6B013095AB1}"/>
+                  </a:ext>
+                </a:extLst>
+              </p:cNvPr>
+              <p:cNvPicPr>
+                <a:picLocks noChangeAspect="1"/>
+              </p:cNvPicPr>
+              <p:nvPr/>
+            </p:nvPicPr>
+            <p:blipFill>
+              <a:blip r:embed="rId2"/>
+              <a:stretch>
+                <a:fillRect/>
+              </a:stretch>
+            </p:blipFill>
+            <p:spPr>
+              <a:xfrm>
+                <a:off x="10009095" y="1400846"/>
+                <a:ext cx="974922" cy="1371600"/>
+              </a:xfrm>
+              <a:prstGeom prst="rect">
+                <a:avLst/>
+              </a:prstGeom>
+            </p:spPr>
+          </p:pic>
+          <p:pic>
+            <p:nvPicPr>
+              <p:cNvPr id="28" name="Picture 27" descr="A white rectangular object with a black border&#10;&#10;Description automatically generated">
+                <a:extLst>
+                  <a:ext uri="{FF2B5EF4-FFF2-40B4-BE49-F238E27FC236}">
+                    <a16:creationId xmlns:a16="http://schemas.microsoft.com/office/drawing/2014/main" id="{F5C06884-E9A7-7D4D-F075-C085ACDA1096}"/>
+                  </a:ext>
+                </a:extLst>
+              </p:cNvPr>
+              <p:cNvPicPr>
+                <a:picLocks noChangeAspect="1"/>
+              </p:cNvPicPr>
+              <p:nvPr/>
+            </p:nvPicPr>
+            <p:blipFill>
+              <a:blip r:embed="rId2"/>
+              <a:stretch>
+                <a:fillRect/>
+              </a:stretch>
+            </p:blipFill>
+            <p:spPr>
+              <a:xfrm>
+                <a:off x="8002356" y="47704"/>
+                <a:ext cx="974922" cy="1371600"/>
+              </a:xfrm>
+              <a:prstGeom prst="rect">
+                <a:avLst/>
+              </a:prstGeom>
+            </p:spPr>
+          </p:pic>
+          <p:pic>
+            <p:nvPicPr>
+              <p:cNvPr id="29" name="Picture 28" descr="A white rectangular object with a black border&#10;&#10;Description automatically generated">
+                <a:extLst>
+                  <a:ext uri="{FF2B5EF4-FFF2-40B4-BE49-F238E27FC236}">
+                    <a16:creationId xmlns:a16="http://schemas.microsoft.com/office/drawing/2014/main" id="{4E39A4B0-7D90-B152-D688-B7D5BAA0D29E}"/>
+                  </a:ext>
+                </a:extLst>
+              </p:cNvPr>
+              <p:cNvPicPr>
+                <a:picLocks noChangeAspect="1"/>
+              </p:cNvPicPr>
+              <p:nvPr/>
+            </p:nvPicPr>
+            <p:blipFill>
+              <a:blip r:embed="rId2"/>
+              <a:stretch>
+                <a:fillRect/>
+              </a:stretch>
+            </p:blipFill>
+            <p:spPr>
+              <a:xfrm>
+                <a:off x="9005728" y="47704"/>
+                <a:ext cx="974922" cy="1371600"/>
+              </a:xfrm>
+              <a:prstGeom prst="rect">
+                <a:avLst/>
+              </a:prstGeom>
+            </p:spPr>
+          </p:pic>
+          <p:pic>
+            <p:nvPicPr>
+              <p:cNvPr id="30" name="Picture 29" descr="A white rectangular object with a black border&#10;&#10;Description automatically generated">
+                <a:extLst>
+                  <a:ext uri="{FF2B5EF4-FFF2-40B4-BE49-F238E27FC236}">
+                    <a16:creationId xmlns:a16="http://schemas.microsoft.com/office/drawing/2014/main" id="{BA8D609A-4F62-80E4-C950-1FA5E562E1DE}"/>
+                  </a:ext>
+                </a:extLst>
+              </p:cNvPr>
+              <p:cNvPicPr>
+                <a:picLocks noChangeAspect="1"/>
+              </p:cNvPicPr>
+              <p:nvPr/>
+            </p:nvPicPr>
+            <p:blipFill>
+              <a:blip r:embed="rId2"/>
+              <a:stretch>
+                <a:fillRect/>
+              </a:stretch>
+            </p:blipFill>
+            <p:spPr>
+              <a:xfrm>
+                <a:off x="10009095" y="47704"/>
+                <a:ext cx="974922" cy="1371600"/>
+              </a:xfrm>
+              <a:prstGeom prst="rect">
+                <a:avLst/>
+              </a:prstGeom>
+            </p:spPr>
+          </p:pic>
+          <p:pic>
+            <p:nvPicPr>
+              <p:cNvPr id="31" name="Picture 30" descr="A white rectangular object with a black border&#10;&#10;Description automatically generated">
+                <a:extLst>
+                  <a:ext uri="{FF2B5EF4-FFF2-40B4-BE49-F238E27FC236}">
+                    <a16:creationId xmlns:a16="http://schemas.microsoft.com/office/drawing/2014/main" id="{2C5625E7-3432-349A-999B-F1F95F34C600}"/>
+                  </a:ext>
+                </a:extLst>
+              </p:cNvPr>
+              <p:cNvPicPr>
+                <a:picLocks noChangeAspect="1"/>
+              </p:cNvPicPr>
+              <p:nvPr/>
+            </p:nvPicPr>
+            <p:blipFill>
+              <a:blip r:embed="rId2"/>
+              <a:stretch>
+                <a:fillRect/>
+              </a:stretch>
+            </p:blipFill>
+            <p:spPr>
+              <a:xfrm>
+                <a:off x="8002356" y="5415207"/>
+                <a:ext cx="974922" cy="1371600"/>
+              </a:xfrm>
+              <a:prstGeom prst="rect">
+                <a:avLst/>
+              </a:prstGeom>
+            </p:spPr>
+          </p:pic>
+          <p:pic>
+            <p:nvPicPr>
+              <p:cNvPr id="32" name="Picture 31" descr="A white rectangular object with a black border&#10;&#10;Description automatically generated">
+                <a:extLst>
+                  <a:ext uri="{FF2B5EF4-FFF2-40B4-BE49-F238E27FC236}">
+                    <a16:creationId xmlns:a16="http://schemas.microsoft.com/office/drawing/2014/main" id="{27B10C19-8DD5-48D3-E8DD-4B0922F4134F}"/>
+                  </a:ext>
+                </a:extLst>
+              </p:cNvPr>
+              <p:cNvPicPr>
+                <a:picLocks noChangeAspect="1"/>
+              </p:cNvPicPr>
+              <p:nvPr/>
+            </p:nvPicPr>
+            <p:blipFill>
+              <a:blip r:embed="rId2"/>
+              <a:stretch>
+                <a:fillRect/>
+              </a:stretch>
+            </p:blipFill>
+            <p:spPr>
+              <a:xfrm>
+                <a:off x="9005728" y="5415207"/>
+                <a:ext cx="974922" cy="1371600"/>
+              </a:xfrm>
+              <a:prstGeom prst="rect">
+                <a:avLst/>
+              </a:prstGeom>
+            </p:spPr>
+          </p:pic>
+          <p:pic>
+            <p:nvPicPr>
+              <p:cNvPr id="33" name="Picture 32" descr="A white rectangular object with a black border&#10;&#10;Description automatically generated">
+                <a:extLst>
+                  <a:ext uri="{FF2B5EF4-FFF2-40B4-BE49-F238E27FC236}">
+                    <a16:creationId xmlns:a16="http://schemas.microsoft.com/office/drawing/2014/main" id="{2F283F3F-5560-02E0-179A-7BBE81298BF9}"/>
+                  </a:ext>
+                </a:extLst>
+              </p:cNvPr>
+              <p:cNvPicPr>
+                <a:picLocks noChangeAspect="1"/>
+              </p:cNvPicPr>
+              <p:nvPr/>
+            </p:nvPicPr>
+            <p:blipFill>
+              <a:blip r:embed="rId2"/>
+              <a:stretch>
+                <a:fillRect/>
+              </a:stretch>
+            </p:blipFill>
+            <p:spPr>
+              <a:xfrm>
+                <a:off x="10009095" y="5415207"/>
+                <a:ext cx="974922" cy="1371600"/>
+              </a:xfrm>
+              <a:prstGeom prst="rect">
+                <a:avLst/>
+              </a:prstGeom>
+            </p:spPr>
+          </p:pic>
+          <p:pic>
+            <p:nvPicPr>
+              <p:cNvPr id="34" name="Picture 33" descr="A white rectangular object with a black border&#10;&#10;Description automatically generated">
+                <a:extLst>
+                  <a:ext uri="{FF2B5EF4-FFF2-40B4-BE49-F238E27FC236}">
+                    <a16:creationId xmlns:a16="http://schemas.microsoft.com/office/drawing/2014/main" id="{7C46523E-49E0-14D5-AB0A-C1366FFA79DB}"/>
+                  </a:ext>
+                </a:extLst>
+              </p:cNvPr>
+              <p:cNvPicPr>
+                <a:picLocks noChangeAspect="1"/>
+              </p:cNvPicPr>
+              <p:nvPr/>
+            </p:nvPicPr>
+            <p:blipFill>
+              <a:blip r:embed="rId2"/>
+              <a:stretch>
+                <a:fillRect/>
+              </a:stretch>
+            </p:blipFill>
+            <p:spPr>
+              <a:xfrm>
+                <a:off x="4051286" y="5415207"/>
+                <a:ext cx="974922" cy="1371600"/>
+              </a:xfrm>
+              <a:prstGeom prst="rect">
+                <a:avLst/>
+              </a:prstGeom>
+            </p:spPr>
+          </p:pic>
+          <p:pic>
+            <p:nvPicPr>
+              <p:cNvPr id="35" name="Picture 34" descr="A white rectangular object with a black border&#10;&#10;Description automatically generated">
+                <a:extLst>
+                  <a:ext uri="{FF2B5EF4-FFF2-40B4-BE49-F238E27FC236}">
+                    <a16:creationId xmlns:a16="http://schemas.microsoft.com/office/drawing/2014/main" id="{3F3F046A-35DB-9EAC-FA0C-33B0B927CE65}"/>
+                  </a:ext>
+                </a:extLst>
+              </p:cNvPr>
+              <p:cNvPicPr>
+                <a:picLocks noChangeAspect="1"/>
+              </p:cNvPicPr>
+              <p:nvPr/>
+            </p:nvPicPr>
+            <p:blipFill>
+              <a:blip r:embed="rId2"/>
+              <a:stretch>
+                <a:fillRect/>
+              </a:stretch>
+            </p:blipFill>
+            <p:spPr>
+              <a:xfrm>
+                <a:off x="5051901" y="5415207"/>
+                <a:ext cx="974922" cy="1371600"/>
+              </a:xfrm>
+              <a:prstGeom prst="rect">
+                <a:avLst/>
+              </a:prstGeom>
+            </p:spPr>
+          </p:pic>
+          <p:pic>
+            <p:nvPicPr>
+              <p:cNvPr id="36" name="Picture 35" descr="A white rectangular object with a black border&#10;&#10;Description automatically generated">
+                <a:extLst>
+                  <a:ext uri="{FF2B5EF4-FFF2-40B4-BE49-F238E27FC236}">
+                    <a16:creationId xmlns:a16="http://schemas.microsoft.com/office/drawing/2014/main" id="{BCE56C03-D790-FF95-948D-10C6D3328C77}"/>
+                  </a:ext>
+                </a:extLst>
+              </p:cNvPr>
+              <p:cNvPicPr>
+                <a:picLocks noChangeAspect="1"/>
+              </p:cNvPicPr>
+              <p:nvPr/>
+            </p:nvPicPr>
+            <p:blipFill>
+              <a:blip r:embed="rId2"/>
+              <a:stretch>
+                <a:fillRect/>
+              </a:stretch>
+            </p:blipFill>
+            <p:spPr>
+              <a:xfrm>
+                <a:off x="6038290" y="5415207"/>
+                <a:ext cx="974922" cy="1371600"/>
+              </a:xfrm>
+              <a:prstGeom prst="rect">
+                <a:avLst/>
+              </a:prstGeom>
+            </p:spPr>
+          </p:pic>
+          <p:pic>
+            <p:nvPicPr>
+              <p:cNvPr id="37" name="Picture 36" descr="A white rectangular object with a black border&#10;&#10;Description automatically generated">
+                <a:extLst>
+                  <a:ext uri="{FF2B5EF4-FFF2-40B4-BE49-F238E27FC236}">
+                    <a16:creationId xmlns:a16="http://schemas.microsoft.com/office/drawing/2014/main" id="{10454D33-FF29-6791-06C3-540AC46597FB}"/>
+                  </a:ext>
+                </a:extLst>
+              </p:cNvPr>
+              <p:cNvPicPr>
+                <a:picLocks noChangeAspect="1"/>
+              </p:cNvPicPr>
+              <p:nvPr/>
+            </p:nvPicPr>
+            <p:blipFill>
+              <a:blip r:embed="rId2"/>
+              <a:stretch>
+                <a:fillRect/>
+              </a:stretch>
+            </p:blipFill>
+            <p:spPr>
+              <a:xfrm>
+                <a:off x="4051286" y="4081095"/>
+                <a:ext cx="974922" cy="1371600"/>
+              </a:xfrm>
+              <a:prstGeom prst="rect">
+                <a:avLst/>
+              </a:prstGeom>
+            </p:spPr>
+          </p:pic>
+          <p:pic>
+            <p:nvPicPr>
+              <p:cNvPr id="38" name="Picture 37" descr="A white rectangular object with a black border&#10;&#10;Description automatically generated">
+                <a:extLst>
+                  <a:ext uri="{FF2B5EF4-FFF2-40B4-BE49-F238E27FC236}">
+                    <a16:creationId xmlns:a16="http://schemas.microsoft.com/office/drawing/2014/main" id="{4ABAE25A-5813-36DD-D8E6-0822E2D8C628}"/>
+                  </a:ext>
+                </a:extLst>
+              </p:cNvPr>
+              <p:cNvPicPr>
+                <a:picLocks noChangeAspect="1"/>
+              </p:cNvPicPr>
+              <p:nvPr/>
+            </p:nvPicPr>
+            <p:blipFill>
+              <a:blip r:embed="rId2"/>
+              <a:stretch>
+                <a:fillRect/>
+              </a:stretch>
+            </p:blipFill>
+            <p:spPr>
+              <a:xfrm>
+                <a:off x="5051901" y="4081095"/>
+                <a:ext cx="974922" cy="1371600"/>
+              </a:xfrm>
+              <a:prstGeom prst="rect">
+                <a:avLst/>
+              </a:prstGeom>
+            </p:spPr>
+          </p:pic>
+          <p:pic>
+            <p:nvPicPr>
+              <p:cNvPr id="39" name="Picture 38" descr="A white rectangular object with a black border&#10;&#10;Description automatically generated">
+                <a:extLst>
+                  <a:ext uri="{FF2B5EF4-FFF2-40B4-BE49-F238E27FC236}">
+                    <a16:creationId xmlns:a16="http://schemas.microsoft.com/office/drawing/2014/main" id="{EBA96554-29FF-8D1D-A72A-D62EAE8C1596}"/>
+                  </a:ext>
+                </a:extLst>
+              </p:cNvPr>
+              <p:cNvPicPr>
+                <a:picLocks noChangeAspect="1"/>
+              </p:cNvPicPr>
+              <p:nvPr/>
+            </p:nvPicPr>
+            <p:blipFill>
+              <a:blip r:embed="rId2"/>
+              <a:stretch>
+                <a:fillRect/>
+              </a:stretch>
+            </p:blipFill>
+            <p:spPr>
+              <a:xfrm>
+                <a:off x="6038290" y="4081095"/>
+                <a:ext cx="974922" cy="1371600"/>
+              </a:xfrm>
+              <a:prstGeom prst="rect">
+                <a:avLst/>
+              </a:prstGeom>
+            </p:spPr>
+          </p:pic>
+          <p:pic>
+            <p:nvPicPr>
+              <p:cNvPr id="40" name="Picture 39" descr="A white rectangular object with a black border&#10;&#10;Description automatically generated">
+                <a:extLst>
+                  <a:ext uri="{FF2B5EF4-FFF2-40B4-BE49-F238E27FC236}">
+                    <a16:creationId xmlns:a16="http://schemas.microsoft.com/office/drawing/2014/main" id="{3BEF8C0E-4B37-AE50-B96D-2A44A03FBB5B}"/>
+                  </a:ext>
+                </a:extLst>
+              </p:cNvPr>
+              <p:cNvPicPr>
+                <a:picLocks noChangeAspect="1"/>
+              </p:cNvPicPr>
+              <p:nvPr/>
+            </p:nvPicPr>
+            <p:blipFill>
+              <a:blip r:embed="rId2"/>
+              <a:stretch>
+                <a:fillRect/>
+              </a:stretch>
+            </p:blipFill>
+            <p:spPr>
+              <a:xfrm>
+                <a:off x="3081486" y="2746566"/>
+                <a:ext cx="974922" cy="1371600"/>
+              </a:xfrm>
+              <a:prstGeom prst="rect">
+                <a:avLst/>
+              </a:prstGeom>
+            </p:spPr>
+          </p:pic>
+          <p:pic>
+            <p:nvPicPr>
+              <p:cNvPr id="41" name="Picture 40" descr="A white rectangular object with a black border&#10;&#10;Description automatically generated">
+                <a:extLst>
+                  <a:ext uri="{FF2B5EF4-FFF2-40B4-BE49-F238E27FC236}">
+                    <a16:creationId xmlns:a16="http://schemas.microsoft.com/office/drawing/2014/main" id="{846163CE-B711-1CD6-D32F-1DFA8A71F298}"/>
+                  </a:ext>
+                </a:extLst>
+              </p:cNvPr>
+              <p:cNvPicPr>
+                <a:picLocks noChangeAspect="1"/>
+              </p:cNvPicPr>
+              <p:nvPr/>
+            </p:nvPicPr>
+            <p:blipFill>
+              <a:blip r:embed="rId2"/>
+              <a:stretch>
+                <a:fillRect/>
+              </a:stretch>
+            </p:blipFill>
+            <p:spPr>
+              <a:xfrm>
+                <a:off x="4051286" y="2746566"/>
+                <a:ext cx="974922" cy="1371600"/>
+              </a:xfrm>
+              <a:prstGeom prst="rect">
+                <a:avLst/>
+              </a:prstGeom>
+            </p:spPr>
+          </p:pic>
+          <p:pic>
+            <p:nvPicPr>
+              <p:cNvPr id="42" name="Picture 41" descr="A white rectangular object with a black border&#10;&#10;Description automatically generated">
+                <a:extLst>
+                  <a:ext uri="{FF2B5EF4-FFF2-40B4-BE49-F238E27FC236}">
+                    <a16:creationId xmlns:a16="http://schemas.microsoft.com/office/drawing/2014/main" id="{A97A7834-4907-80DB-AB15-FDB0D650FB19}"/>
+                  </a:ext>
+                </a:extLst>
+              </p:cNvPr>
+              <p:cNvPicPr>
+                <a:picLocks noChangeAspect="1"/>
+              </p:cNvPicPr>
+              <p:nvPr/>
+            </p:nvPicPr>
+            <p:blipFill>
+              <a:blip r:embed="rId2"/>
+              <a:stretch>
+                <a:fillRect/>
+              </a:stretch>
+            </p:blipFill>
+            <p:spPr>
+              <a:xfrm>
+                <a:off x="5051901" y="2746566"/>
+                <a:ext cx="974922" cy="1371600"/>
+              </a:xfrm>
+              <a:prstGeom prst="rect">
+                <a:avLst/>
+              </a:prstGeom>
+            </p:spPr>
+          </p:pic>
+          <p:pic>
+            <p:nvPicPr>
+              <p:cNvPr id="43" name="Picture 42" descr="A white rectangular object with a black border&#10;&#10;Description automatically generated">
+                <a:extLst>
+                  <a:ext uri="{FF2B5EF4-FFF2-40B4-BE49-F238E27FC236}">
+                    <a16:creationId xmlns:a16="http://schemas.microsoft.com/office/drawing/2014/main" id="{14441FC5-5D4D-F557-C96A-3A971468C85E}"/>
+                  </a:ext>
+                </a:extLst>
+              </p:cNvPr>
+              <p:cNvPicPr>
+                <a:picLocks noChangeAspect="1"/>
+              </p:cNvPicPr>
+              <p:nvPr/>
+            </p:nvPicPr>
+            <p:blipFill>
+              <a:blip r:embed="rId2"/>
+              <a:stretch>
+                <a:fillRect/>
+              </a:stretch>
+            </p:blipFill>
+            <p:spPr>
+              <a:xfrm>
+                <a:off x="1088970" y="5415207"/>
+                <a:ext cx="974922" cy="1371600"/>
+              </a:xfrm>
+              <a:prstGeom prst="rect">
+                <a:avLst/>
+              </a:prstGeom>
+            </p:spPr>
+          </p:pic>
+          <p:pic>
+            <p:nvPicPr>
+              <p:cNvPr id="44" name="Picture 43" descr="A white rectangular object with a black border&#10;&#10;Description automatically generated">
+                <a:extLst>
+                  <a:ext uri="{FF2B5EF4-FFF2-40B4-BE49-F238E27FC236}">
+                    <a16:creationId xmlns:a16="http://schemas.microsoft.com/office/drawing/2014/main" id="{F305A588-0854-5E69-495F-42777AE9AE3F}"/>
+                  </a:ext>
+                </a:extLst>
+              </p:cNvPr>
+              <p:cNvPicPr>
+                <a:picLocks noChangeAspect="1"/>
+              </p:cNvPicPr>
+              <p:nvPr/>
+            </p:nvPicPr>
+            <p:blipFill>
+              <a:blip r:embed="rId2"/>
+              <a:stretch>
+                <a:fillRect/>
+              </a:stretch>
+            </p:blipFill>
+            <p:spPr>
+              <a:xfrm>
+                <a:off x="2084693" y="5415207"/>
+                <a:ext cx="974922" cy="1371600"/>
+              </a:xfrm>
+              <a:prstGeom prst="rect">
+                <a:avLst/>
+              </a:prstGeom>
+            </p:spPr>
+          </p:pic>
+          <p:pic>
+            <p:nvPicPr>
+              <p:cNvPr id="45" name="Picture 44" descr="A white rectangular object with a black border&#10;&#10;Description automatically generated">
+                <a:extLst>
+                  <a:ext uri="{FF2B5EF4-FFF2-40B4-BE49-F238E27FC236}">
+                    <a16:creationId xmlns:a16="http://schemas.microsoft.com/office/drawing/2014/main" id="{F3621CCF-C3D2-BDC9-FAFC-452681145856}"/>
+                  </a:ext>
+                </a:extLst>
+              </p:cNvPr>
+              <p:cNvPicPr>
+                <a:picLocks noChangeAspect="1"/>
+              </p:cNvPicPr>
+              <p:nvPr/>
+            </p:nvPicPr>
+            <p:blipFill>
+              <a:blip r:embed="rId2"/>
+              <a:stretch>
+                <a:fillRect/>
+              </a:stretch>
+            </p:blipFill>
+            <p:spPr>
+              <a:xfrm>
+                <a:off x="3081486" y="5415207"/>
+                <a:ext cx="974922" cy="1371600"/>
+              </a:xfrm>
+              <a:prstGeom prst="rect">
+                <a:avLst/>
+              </a:prstGeom>
+            </p:spPr>
+          </p:pic>
+          <p:pic>
+            <p:nvPicPr>
+              <p:cNvPr id="46" name="Picture 45" descr="A white rectangular object with a black border&#10;&#10;Description automatically generated">
+                <a:extLst>
+                  <a:ext uri="{FF2B5EF4-FFF2-40B4-BE49-F238E27FC236}">
+                    <a16:creationId xmlns:a16="http://schemas.microsoft.com/office/drawing/2014/main" id="{0AADB590-6450-B2D3-621E-3134C71E9445}"/>
+                  </a:ext>
+                </a:extLst>
+              </p:cNvPr>
+              <p:cNvPicPr>
+                <a:picLocks noChangeAspect="1"/>
+              </p:cNvPicPr>
+              <p:nvPr/>
+            </p:nvPicPr>
+            <p:blipFill>
+              <a:blip r:embed="rId2"/>
+              <a:stretch>
+                <a:fillRect/>
+              </a:stretch>
+            </p:blipFill>
+            <p:spPr>
+              <a:xfrm>
+                <a:off x="2084693" y="4081095"/>
+                <a:ext cx="974922" cy="1371600"/>
+              </a:xfrm>
+              <a:prstGeom prst="rect">
+                <a:avLst/>
+              </a:prstGeom>
+            </p:spPr>
+          </p:pic>
+          <p:pic>
+            <p:nvPicPr>
+              <p:cNvPr id="47" name="Picture 46" descr="A white rectangular object with a black border&#10;&#10;Description automatically generated">
+                <a:extLst>
+                  <a:ext uri="{FF2B5EF4-FFF2-40B4-BE49-F238E27FC236}">
+                    <a16:creationId xmlns:a16="http://schemas.microsoft.com/office/drawing/2014/main" id="{6579EB35-990A-8861-7AA3-D0C5F44DAFB7}"/>
+                  </a:ext>
+                </a:extLst>
+              </p:cNvPr>
+              <p:cNvPicPr>
+                <a:picLocks noChangeAspect="1"/>
+              </p:cNvPicPr>
+              <p:nvPr/>
+            </p:nvPicPr>
+            <p:blipFill>
+              <a:blip r:embed="rId2"/>
+              <a:stretch>
+                <a:fillRect/>
+              </a:stretch>
+            </p:blipFill>
+            <p:spPr>
+              <a:xfrm>
+                <a:off x="3081486" y="4081095"/>
+                <a:ext cx="974922" cy="1371600"/>
+              </a:xfrm>
+              <a:prstGeom prst="rect">
+                <a:avLst/>
+              </a:prstGeom>
+            </p:spPr>
+          </p:pic>
+          <p:pic>
+            <p:nvPicPr>
+              <p:cNvPr id="48" name="Picture 47" descr="A white rectangular object with a black border&#10;&#10;Description automatically generated">
+                <a:extLst>
+                  <a:ext uri="{FF2B5EF4-FFF2-40B4-BE49-F238E27FC236}">
+                    <a16:creationId xmlns:a16="http://schemas.microsoft.com/office/drawing/2014/main" id="{0547BBFF-7F3E-C17F-2101-ABE0D28B3AEE}"/>
+                  </a:ext>
+                </a:extLst>
+              </p:cNvPr>
+              <p:cNvPicPr>
+                <a:picLocks noChangeAspect="1"/>
+              </p:cNvPicPr>
+              <p:nvPr/>
+            </p:nvPicPr>
+            <p:blipFill>
+              <a:blip r:embed="rId2"/>
+              <a:stretch>
+                <a:fillRect/>
+              </a:stretch>
+            </p:blipFill>
+            <p:spPr>
+              <a:xfrm>
+                <a:off x="1088970" y="2746566"/>
+                <a:ext cx="974922" cy="1371600"/>
+              </a:xfrm>
+              <a:prstGeom prst="rect">
+                <a:avLst/>
+              </a:prstGeom>
+            </p:spPr>
+          </p:pic>
+          <p:pic>
+            <p:nvPicPr>
+              <p:cNvPr id="49" name="Picture 48" descr="A white rectangular object with a black border&#10;&#10;Description automatically generated">
+                <a:extLst>
+                  <a:ext uri="{FF2B5EF4-FFF2-40B4-BE49-F238E27FC236}">
+                    <a16:creationId xmlns:a16="http://schemas.microsoft.com/office/drawing/2014/main" id="{6888A316-9DB4-020F-7D23-EC661AF31B62}"/>
+                  </a:ext>
+                </a:extLst>
+              </p:cNvPr>
+              <p:cNvPicPr>
+                <a:picLocks noChangeAspect="1"/>
+              </p:cNvPicPr>
+              <p:nvPr/>
+            </p:nvPicPr>
+            <p:blipFill>
+              <a:blip r:embed="rId2"/>
+              <a:stretch>
+                <a:fillRect/>
+              </a:stretch>
+            </p:blipFill>
+            <p:spPr>
+              <a:xfrm>
+                <a:off x="2084693" y="2746566"/>
+                <a:ext cx="974922" cy="1371600"/>
+              </a:xfrm>
+              <a:prstGeom prst="rect">
+                <a:avLst/>
+              </a:prstGeom>
+            </p:spPr>
+          </p:pic>
+          <p:pic>
+            <p:nvPicPr>
+              <p:cNvPr id="50" name="Picture 49" descr="A white rectangular object with a black border&#10;&#10;Description automatically generated">
+                <a:extLst>
+                  <a:ext uri="{FF2B5EF4-FFF2-40B4-BE49-F238E27FC236}">
+                    <a16:creationId xmlns:a16="http://schemas.microsoft.com/office/drawing/2014/main" id="{F9286D91-9E73-C9C2-890F-8DCFA4027AD8}"/>
+                  </a:ext>
+                </a:extLst>
+              </p:cNvPr>
+              <p:cNvPicPr>
+                <a:picLocks noChangeAspect="1"/>
+              </p:cNvPicPr>
+              <p:nvPr/>
+            </p:nvPicPr>
+            <p:blipFill>
+              <a:blip r:embed="rId2"/>
+              <a:stretch>
+                <a:fillRect/>
+              </a:stretch>
+            </p:blipFill>
+            <p:spPr>
+              <a:xfrm>
+                <a:off x="1088970" y="1400846"/>
+                <a:ext cx="974922" cy="1371600"/>
+              </a:xfrm>
+              <a:prstGeom prst="rect">
+                <a:avLst/>
+              </a:prstGeom>
+            </p:spPr>
+          </p:pic>
+          <p:pic>
+            <p:nvPicPr>
+              <p:cNvPr id="51" name="Picture 50" descr="A white rectangular object with a black border&#10;&#10;Description automatically generated">
+                <a:extLst>
+                  <a:ext uri="{FF2B5EF4-FFF2-40B4-BE49-F238E27FC236}">
+                    <a16:creationId xmlns:a16="http://schemas.microsoft.com/office/drawing/2014/main" id="{224F6CBD-7832-28B8-8CB6-31BFC4A10AD6}"/>
+                  </a:ext>
+                </a:extLst>
+              </p:cNvPr>
+              <p:cNvPicPr>
+                <a:picLocks noChangeAspect="1"/>
+              </p:cNvPicPr>
+              <p:nvPr/>
+            </p:nvPicPr>
+            <p:blipFill>
+              <a:blip r:embed="rId2"/>
+              <a:stretch>
+                <a:fillRect/>
+              </a:stretch>
+            </p:blipFill>
+            <p:spPr>
+              <a:xfrm>
+                <a:off x="2084693" y="1400846"/>
+                <a:ext cx="974922" cy="1371600"/>
+              </a:xfrm>
+              <a:prstGeom prst="rect">
+                <a:avLst/>
+              </a:prstGeom>
+            </p:spPr>
+          </p:pic>
+          <p:pic>
+            <p:nvPicPr>
+              <p:cNvPr id="52" name="Picture 51" descr="A white rectangular object with a black border&#10;&#10;Description automatically generated">
+                <a:extLst>
+                  <a:ext uri="{FF2B5EF4-FFF2-40B4-BE49-F238E27FC236}">
+                    <a16:creationId xmlns:a16="http://schemas.microsoft.com/office/drawing/2014/main" id="{DB91C6C5-6B42-C18D-273C-46A7234402EF}"/>
+                  </a:ext>
+                </a:extLst>
+              </p:cNvPr>
+              <p:cNvPicPr>
+                <a:picLocks noChangeAspect="1"/>
+              </p:cNvPicPr>
+              <p:nvPr/>
+            </p:nvPicPr>
+            <p:blipFill>
+              <a:blip r:embed="rId2"/>
+              <a:stretch>
+                <a:fillRect/>
+              </a:stretch>
+            </p:blipFill>
+            <p:spPr>
+              <a:xfrm>
+                <a:off x="4051286" y="1400846"/>
+                <a:ext cx="974922" cy="1371600"/>
+              </a:xfrm>
+              <a:prstGeom prst="rect">
+                <a:avLst/>
+              </a:prstGeom>
+            </p:spPr>
+          </p:pic>
+          <p:pic>
+            <p:nvPicPr>
+              <p:cNvPr id="53" name="Picture 52" descr="A white rectangular object with a black border&#10;&#10;Description automatically generated">
+                <a:extLst>
+                  <a:ext uri="{FF2B5EF4-FFF2-40B4-BE49-F238E27FC236}">
+                    <a16:creationId xmlns:a16="http://schemas.microsoft.com/office/drawing/2014/main" id="{FCD6AA98-97DE-93C3-B689-03B2F9B393C3}"/>
+                  </a:ext>
+                </a:extLst>
+              </p:cNvPr>
+              <p:cNvPicPr>
+                <a:picLocks noChangeAspect="1"/>
+              </p:cNvPicPr>
+              <p:nvPr/>
+            </p:nvPicPr>
+            <p:blipFill>
+              <a:blip r:embed="rId2"/>
+              <a:stretch>
+                <a:fillRect/>
+              </a:stretch>
+            </p:blipFill>
+            <p:spPr>
+              <a:xfrm>
+                <a:off x="5051901" y="1400846"/>
+                <a:ext cx="974922" cy="1371600"/>
+              </a:xfrm>
+              <a:prstGeom prst="rect">
+                <a:avLst/>
+              </a:prstGeom>
+            </p:spPr>
+          </p:pic>
+        </p:grpSp>
+        <p:pic>
+          <p:nvPicPr>
+            <p:cNvPr id="55" name="Picture 54" descr="A yellow star on a white background&#10;&#10;Description automatically generated">
+              <a:extLst>
+                <a:ext uri="{FF2B5EF4-FFF2-40B4-BE49-F238E27FC236}">
+                  <a16:creationId xmlns:a16="http://schemas.microsoft.com/office/drawing/2014/main" id="{1F664671-9791-164C-6C41-4179E78F7C94}"/>
+                </a:ext>
+              </a:extLst>
+            </p:cNvPr>
+            <p:cNvPicPr>
+              <a:picLocks noChangeAspect="1"/>
+            </p:cNvPicPr>
+            <p:nvPr/>
+          </p:nvPicPr>
+          <p:blipFill>
+            <a:blip r:embed="rId3"/>
+            <a:stretch>
+              <a:fillRect/>
+            </a:stretch>
+          </p:blipFill>
+          <p:spPr>
+            <a:xfrm>
+              <a:off x="3078729" y="1405305"/>
+              <a:ext cx="974922" cy="1371600"/>
+            </a:xfrm>
+            <a:prstGeom prst="rect">
+              <a:avLst/>
+            </a:prstGeom>
+          </p:spPr>
+        </p:pic>
+        <p:pic>
+          <p:nvPicPr>
+            <p:cNvPr id="56" name="Picture 55" descr="A yellow star on a white background&#10;&#10;Description automatically generated">
+              <a:extLst>
+                <a:ext uri="{FF2B5EF4-FFF2-40B4-BE49-F238E27FC236}">
+                  <a16:creationId xmlns:a16="http://schemas.microsoft.com/office/drawing/2014/main" id="{DDF957E2-F9CD-856A-B915-7A808B17249C}"/>
+                </a:ext>
+              </a:extLst>
+            </p:cNvPr>
+            <p:cNvPicPr>
+              <a:picLocks noChangeAspect="1"/>
+            </p:cNvPicPr>
+            <p:nvPr/>
+          </p:nvPicPr>
+          <p:blipFill>
+            <a:blip r:embed="rId3"/>
+            <a:stretch>
+              <a:fillRect/>
+            </a:stretch>
+          </p:blipFill>
+          <p:spPr>
+            <a:xfrm>
+              <a:off x="6038288" y="2772446"/>
+              <a:ext cx="974922" cy="1371600"/>
+            </a:xfrm>
+            <a:prstGeom prst="rect">
+              <a:avLst/>
+            </a:prstGeom>
+          </p:spPr>
+        </p:pic>
+        <p:pic>
+          <p:nvPicPr>
+            <p:cNvPr id="57" name="Picture 56" descr="A yellow star on a white background&#10;&#10;Description automatically generated">
+              <a:extLst>
+                <a:ext uri="{FF2B5EF4-FFF2-40B4-BE49-F238E27FC236}">
+                  <a16:creationId xmlns:a16="http://schemas.microsoft.com/office/drawing/2014/main" id="{1B938C09-6E04-E150-573E-C542CEBB6E53}"/>
+                </a:ext>
+              </a:extLst>
+            </p:cNvPr>
+            <p:cNvPicPr>
+              <a:picLocks noChangeAspect="1"/>
+            </p:cNvPicPr>
+            <p:nvPr/>
+          </p:nvPicPr>
+          <p:blipFill>
+            <a:blip r:embed="rId3"/>
+            <a:stretch>
+              <a:fillRect/>
+            </a:stretch>
+          </p:blipFill>
+          <p:spPr>
+            <a:xfrm>
+              <a:off x="7027434" y="5415207"/>
+              <a:ext cx="974922" cy="1371600"/>
+            </a:xfrm>
+            <a:prstGeom prst="rect">
+              <a:avLst/>
+            </a:prstGeom>
+          </p:spPr>
+        </p:pic>
+      </p:grpSp>
+    </p:spTree>
+    <p:extLst>
+      <p:ext uri="{BB962C8B-B14F-4D97-AF65-F5344CB8AC3E}">
+        <p14:creationId xmlns:p14="http://schemas.microsoft.com/office/powerpoint/2010/main" val="4159399043"/>
+      </p:ext>
+    </p:extLst>
+  </p:cSld>
+  <p:clrMapOvr>
+    <a:masterClrMapping/>
+  </p:clrMapOvr>
+</p:sld>
+</file>
+
+<file path=ppt/slides/slide13.xml><?xml version="1.0" encoding="utf-8"?>
+<p:sld xmlns:a="http://schemas.openxmlformats.org/drawingml/2006/main" xmlns:r="http://schemas.openxmlformats.org/officeDocument/2006/relationships" xmlns:p="http://schemas.openxmlformats.org/presentationml/2006/main">
+  <p:cSld>
+    <p:spTree>
+      <p:nvGrpSpPr>
+        <p:cNvPr id="1" name="">
+          <a:extLst>
+            <a:ext uri="{FF2B5EF4-FFF2-40B4-BE49-F238E27FC236}">
               <a16:creationId xmlns:a16="http://schemas.microsoft.com/office/drawing/2014/main" id="{524FA786-584C-8359-5812-DB570C053A8C}"/>
             </a:ext>
           </a:extLst>
@@ -6646,36 +9860,6 @@
           </p:spPr>
         </p:pic>
       </p:grpSp>
-      <p:pic>
-        <p:nvPicPr>
-          <p:cNvPr id="18" name="Picture 17" descr="A grey rectangular object with a black border&#10;&#10;Description automatically generated">
-            <a:extLst>
-              <a:ext uri="{FF2B5EF4-FFF2-40B4-BE49-F238E27FC236}">
-                <a16:creationId xmlns:a16="http://schemas.microsoft.com/office/drawing/2014/main" id="{1D1E85A6-E28E-5D61-EA32-263A21767CCE}"/>
-              </a:ext>
-            </a:extLst>
-          </p:cNvPr>
-          <p:cNvPicPr>
-            <a:picLocks noChangeAspect="1"/>
-          </p:cNvPicPr>
-          <p:nvPr/>
-        </p:nvPicPr>
-        <p:blipFill>
-          <a:blip r:embed="rId2"/>
-          <a:stretch>
-            <a:fillRect/>
-          </a:stretch>
-        </p:blipFill>
-        <p:spPr>
-          <a:xfrm>
-            <a:off x="1339452" y="6705238"/>
-            <a:ext cx="129507" cy="124326"/>
-          </a:xfrm>
-          <a:prstGeom prst="rect">
-            <a:avLst/>
-          </a:prstGeom>
-        </p:spPr>
-      </p:pic>
     </p:spTree>
     <p:extLst>
       <p:ext uri="{BB962C8B-B14F-4D97-AF65-F5344CB8AC3E}">
@@ -6686,13 +9870,13 @@
   <p:clrMapOvr>
     <a:masterClrMapping/>
   </p:clrMapOvr>
-  <mc:AlternateContent xmlns:mc="http://schemas.openxmlformats.org/markup-compatibility/2006">
-    <mc:Choice xmlns:p159="http://schemas.microsoft.com/office/powerpoint/2015/09/main" Requires="p159">
+  <mc:AlternateContent xmlns:mc="http://schemas.openxmlformats.org/markup-compatibility/2006" xmlns:p159="http://schemas.microsoft.com/office/powerpoint/2015/09/main">
+    <mc:Choice Requires="p159">
       <p:transition xmlns:p14="http://schemas.microsoft.com/office/powerpoint/2010/main" spd="slow" p14:dur="2000">
         <p159:morph option="byObject"/>
       </p:transition>
     </mc:Choice>
-    <mc:Fallback>
+    <mc:Fallback xmlns="">
       <p:transition spd="slow">
         <p:fade/>
       </p:transition>
@@ -6701,7 +9885,7 @@
 </p:sld>
 </file>
 
-<file path=ppt/slides/slide12.xml><?xml version="1.0" encoding="utf-8"?>
+<file path=ppt/slides/slide14.xml><?xml version="1.0" encoding="utf-8"?>
 <p:sld xmlns:a="http://schemas.openxmlformats.org/drawingml/2006/main" xmlns:r="http://schemas.openxmlformats.org/officeDocument/2006/relationships" xmlns:p="http://schemas.openxmlformats.org/presentationml/2006/main">
   <p:cSld>
     <p:spTree>
@@ -8310,13 +11494,1582 @@
   <p:clrMapOvr>
     <a:masterClrMapping/>
   </p:clrMapOvr>
-  <mc:AlternateContent xmlns:mc="http://schemas.openxmlformats.org/markup-compatibility/2006">
-    <mc:Choice xmlns:p159="http://schemas.microsoft.com/office/powerpoint/2015/09/main" Requires="p159">
+  <mc:AlternateContent xmlns:mc="http://schemas.openxmlformats.org/markup-compatibility/2006" xmlns:p159="http://schemas.microsoft.com/office/powerpoint/2015/09/main">
+    <mc:Choice Requires="p159">
       <p:transition xmlns:p14="http://schemas.microsoft.com/office/powerpoint/2010/main" spd="slow" p14:dur="2000">
         <p159:morph option="byObject"/>
       </p:transition>
     </mc:Choice>
-    <mc:Fallback>
+    <mc:Fallback xmlns="">
+      <p:transition spd="slow">
+        <p:fade/>
+      </p:transition>
+    </mc:Fallback>
+  </mc:AlternateContent>
+</p:sld>
+</file>
+
+<file path=ppt/slides/slide15.xml><?xml version="1.0" encoding="utf-8"?>
+<p:sld xmlns:a="http://schemas.openxmlformats.org/drawingml/2006/main" xmlns:r="http://schemas.openxmlformats.org/officeDocument/2006/relationships" xmlns:p="http://schemas.openxmlformats.org/presentationml/2006/main">
+  <p:cSld>
+    <p:spTree>
+      <p:nvGrpSpPr>
+        <p:cNvPr id="1" name="">
+          <a:extLst>
+            <a:ext uri="{FF2B5EF4-FFF2-40B4-BE49-F238E27FC236}">
+              <a16:creationId xmlns:a16="http://schemas.microsoft.com/office/drawing/2014/main" id="{FF02B7F5-69AF-6518-8774-022AF2AEEEBC}"/>
+            </a:ext>
+          </a:extLst>
+        </p:cNvPr>
+        <p:cNvGrpSpPr/>
+        <p:nvPr/>
+      </p:nvGrpSpPr>
+      <p:grpSpPr>
+        <a:xfrm>
+          <a:off x="0" y="0"/>
+          <a:ext cx="0" cy="0"/>
+          <a:chOff x="0" y="0"/>
+          <a:chExt cx="0" cy="0"/>
+        </a:xfrm>
+      </p:grpSpPr>
+      <p:pic>
+        <p:nvPicPr>
+          <p:cNvPr id="4" name="Picture 3" descr="A grey rectangular object with a black border&#10;&#10;Description automatically generated">
+            <a:extLst>
+              <a:ext uri="{FF2B5EF4-FFF2-40B4-BE49-F238E27FC236}">
+                <a16:creationId xmlns:a16="http://schemas.microsoft.com/office/drawing/2014/main" id="{C02E5E89-A07A-DAD0-633E-F19E3CE14689}"/>
+              </a:ext>
+            </a:extLst>
+          </p:cNvPr>
+          <p:cNvPicPr>
+            <a:picLocks noChangeAspect="1"/>
+          </p:cNvPicPr>
+          <p:nvPr/>
+        </p:nvPicPr>
+        <p:blipFill>
+          <a:blip r:embed="rId2"/>
+          <a:stretch>
+            <a:fillRect/>
+          </a:stretch>
+        </p:blipFill>
+        <p:spPr>
+          <a:xfrm>
+            <a:off x="909004" y="54524"/>
+            <a:ext cx="974921" cy="1371600"/>
+          </a:xfrm>
+          <a:prstGeom prst="rect">
+            <a:avLst/>
+          </a:prstGeom>
+        </p:spPr>
+      </p:pic>
+      <p:pic>
+        <p:nvPicPr>
+          <p:cNvPr id="5" name="Picture 4" descr="A grey rectangular object with a black border&#10;&#10;Description automatically generated">
+            <a:extLst>
+              <a:ext uri="{FF2B5EF4-FFF2-40B4-BE49-F238E27FC236}">
+                <a16:creationId xmlns:a16="http://schemas.microsoft.com/office/drawing/2014/main" id="{196C84EA-E77B-CF7E-4847-384B28AAF760}"/>
+              </a:ext>
+            </a:extLst>
+          </p:cNvPr>
+          <p:cNvPicPr>
+            <a:picLocks noChangeAspect="1"/>
+          </p:cNvPicPr>
+          <p:nvPr/>
+        </p:nvPicPr>
+        <p:blipFill>
+          <a:blip r:embed="rId2"/>
+          <a:stretch>
+            <a:fillRect/>
+          </a:stretch>
+        </p:blipFill>
+        <p:spPr>
+          <a:xfrm>
+            <a:off x="1886153" y="54524"/>
+            <a:ext cx="974921" cy="1371600"/>
+          </a:xfrm>
+          <a:prstGeom prst="rect">
+            <a:avLst/>
+          </a:prstGeom>
+        </p:spPr>
+      </p:pic>
+      <p:pic>
+        <p:nvPicPr>
+          <p:cNvPr id="6" name="Picture 5" descr="A grey rectangular object with a black border&#10;&#10;Description automatically generated">
+            <a:extLst>
+              <a:ext uri="{FF2B5EF4-FFF2-40B4-BE49-F238E27FC236}">
+                <a16:creationId xmlns:a16="http://schemas.microsoft.com/office/drawing/2014/main" id="{323D4F45-383B-5674-BDB0-0CE312B8066B}"/>
+              </a:ext>
+            </a:extLst>
+          </p:cNvPr>
+          <p:cNvPicPr>
+            <a:picLocks noChangeAspect="1"/>
+          </p:cNvPicPr>
+          <p:nvPr/>
+        </p:nvPicPr>
+        <p:blipFill>
+          <a:blip r:embed="rId2"/>
+          <a:stretch>
+            <a:fillRect/>
+          </a:stretch>
+        </p:blipFill>
+        <p:spPr>
+          <a:xfrm>
+            <a:off x="2861076" y="54524"/>
+            <a:ext cx="974921" cy="1371600"/>
+          </a:xfrm>
+          <a:prstGeom prst="rect">
+            <a:avLst/>
+          </a:prstGeom>
+        </p:spPr>
+      </p:pic>
+      <p:pic>
+        <p:nvPicPr>
+          <p:cNvPr id="7" name="Picture 6" descr="A grey rectangular object with a black border&#10;&#10;Description automatically generated">
+            <a:extLst>
+              <a:ext uri="{FF2B5EF4-FFF2-40B4-BE49-F238E27FC236}">
+                <a16:creationId xmlns:a16="http://schemas.microsoft.com/office/drawing/2014/main" id="{4611034D-A684-578A-18FB-A5DE598303B3}"/>
+              </a:ext>
+            </a:extLst>
+          </p:cNvPr>
+          <p:cNvPicPr>
+            <a:picLocks noChangeAspect="1"/>
+          </p:cNvPicPr>
+          <p:nvPr/>
+        </p:nvPicPr>
+        <p:blipFill>
+          <a:blip r:embed="rId2"/>
+          <a:stretch>
+            <a:fillRect/>
+          </a:stretch>
+        </p:blipFill>
+        <p:spPr>
+          <a:xfrm>
+            <a:off x="3838225" y="54524"/>
+            <a:ext cx="974921" cy="1371600"/>
+          </a:xfrm>
+          <a:prstGeom prst="rect">
+            <a:avLst/>
+          </a:prstGeom>
+        </p:spPr>
+      </p:pic>
+      <p:pic>
+        <p:nvPicPr>
+          <p:cNvPr id="8" name="Picture 7" descr="A grey rectangular object with a black border&#10;&#10;Description automatically generated">
+            <a:extLst>
+              <a:ext uri="{FF2B5EF4-FFF2-40B4-BE49-F238E27FC236}">
+                <a16:creationId xmlns:a16="http://schemas.microsoft.com/office/drawing/2014/main" id="{52ECC573-2C7E-5A01-1ABE-AAFFD75BD174}"/>
+              </a:ext>
+            </a:extLst>
+          </p:cNvPr>
+          <p:cNvPicPr>
+            <a:picLocks noChangeAspect="1"/>
+          </p:cNvPicPr>
+          <p:nvPr/>
+        </p:nvPicPr>
+        <p:blipFill>
+          <a:blip r:embed="rId2"/>
+          <a:stretch>
+            <a:fillRect/>
+          </a:stretch>
+        </p:blipFill>
+        <p:spPr>
+          <a:xfrm>
+            <a:off x="4813148" y="59835"/>
+            <a:ext cx="974921" cy="1371600"/>
+          </a:xfrm>
+          <a:prstGeom prst="rect">
+            <a:avLst/>
+          </a:prstGeom>
+        </p:spPr>
+      </p:pic>
+      <p:pic>
+        <p:nvPicPr>
+          <p:cNvPr id="9" name="Picture 8" descr="A grey rectangular object with a black border&#10;&#10;Description automatically generated">
+            <a:extLst>
+              <a:ext uri="{FF2B5EF4-FFF2-40B4-BE49-F238E27FC236}">
+                <a16:creationId xmlns:a16="http://schemas.microsoft.com/office/drawing/2014/main" id="{EDFD9FB2-4238-9974-29B7-A893A19271C6}"/>
+              </a:ext>
+            </a:extLst>
+          </p:cNvPr>
+          <p:cNvPicPr>
+            <a:picLocks noChangeAspect="1"/>
+          </p:cNvPicPr>
+          <p:nvPr/>
+        </p:nvPicPr>
+        <p:blipFill>
+          <a:blip r:embed="rId2"/>
+          <a:stretch>
+            <a:fillRect/>
+          </a:stretch>
+        </p:blipFill>
+        <p:spPr>
+          <a:xfrm>
+            <a:off x="5790299" y="65146"/>
+            <a:ext cx="974921" cy="1371600"/>
+          </a:xfrm>
+          <a:prstGeom prst="rect">
+            <a:avLst/>
+          </a:prstGeom>
+        </p:spPr>
+      </p:pic>
+      <p:pic>
+        <p:nvPicPr>
+          <p:cNvPr id="12" name="Picture 11" descr="A grey rectangular object with a black border&#10;&#10;Description automatically generated">
+            <a:extLst>
+              <a:ext uri="{FF2B5EF4-FFF2-40B4-BE49-F238E27FC236}">
+                <a16:creationId xmlns:a16="http://schemas.microsoft.com/office/drawing/2014/main" id="{1E735A7C-EC06-8150-FF79-CF910864FA6F}"/>
+              </a:ext>
+            </a:extLst>
+          </p:cNvPr>
+          <p:cNvPicPr>
+            <a:picLocks noChangeAspect="1"/>
+          </p:cNvPicPr>
+          <p:nvPr/>
+        </p:nvPicPr>
+        <p:blipFill>
+          <a:blip r:embed="rId2"/>
+          <a:stretch>
+            <a:fillRect/>
+          </a:stretch>
+        </p:blipFill>
+        <p:spPr>
+          <a:xfrm>
+            <a:off x="9712039" y="65146"/>
+            <a:ext cx="974921" cy="1371600"/>
+          </a:xfrm>
+          <a:prstGeom prst="rect">
+            <a:avLst/>
+          </a:prstGeom>
+        </p:spPr>
+      </p:pic>
+      <p:pic>
+        <p:nvPicPr>
+          <p:cNvPr id="13" name="Picture 12" descr="A grey rectangular object with a black border&#10;&#10;Description automatically generated">
+            <a:extLst>
+              <a:ext uri="{FF2B5EF4-FFF2-40B4-BE49-F238E27FC236}">
+                <a16:creationId xmlns:a16="http://schemas.microsoft.com/office/drawing/2014/main" id="{68292070-CF2F-DF8A-531B-2CD0D149FBC5}"/>
+              </a:ext>
+            </a:extLst>
+          </p:cNvPr>
+          <p:cNvPicPr>
+            <a:picLocks noChangeAspect="1"/>
+          </p:cNvPicPr>
+          <p:nvPr/>
+        </p:nvPicPr>
+        <p:blipFill>
+          <a:blip r:embed="rId2"/>
+          <a:stretch>
+            <a:fillRect/>
+          </a:stretch>
+        </p:blipFill>
+        <p:spPr>
+          <a:xfrm>
+            <a:off x="6765222" y="65146"/>
+            <a:ext cx="974921" cy="1371600"/>
+          </a:xfrm>
+          <a:prstGeom prst="rect">
+            <a:avLst/>
+          </a:prstGeom>
+        </p:spPr>
+      </p:pic>
+      <p:pic>
+        <p:nvPicPr>
+          <p:cNvPr id="14" name="Picture 13" descr="A grey rectangular object with a black border&#10;&#10;Description automatically generated">
+            <a:extLst>
+              <a:ext uri="{FF2B5EF4-FFF2-40B4-BE49-F238E27FC236}">
+                <a16:creationId xmlns:a16="http://schemas.microsoft.com/office/drawing/2014/main" id="{9DB953C6-8BA3-D4BE-1E37-DBA26D515FE9}"/>
+              </a:ext>
+            </a:extLst>
+          </p:cNvPr>
+          <p:cNvPicPr>
+            <a:picLocks noChangeAspect="1"/>
+          </p:cNvPicPr>
+          <p:nvPr/>
+        </p:nvPicPr>
+        <p:blipFill>
+          <a:blip r:embed="rId2"/>
+          <a:stretch>
+            <a:fillRect/>
+          </a:stretch>
+        </p:blipFill>
+        <p:spPr>
+          <a:xfrm>
+            <a:off x="7740143" y="65146"/>
+            <a:ext cx="974921" cy="1371600"/>
+          </a:xfrm>
+          <a:prstGeom prst="rect">
+            <a:avLst/>
+          </a:prstGeom>
+        </p:spPr>
+      </p:pic>
+      <p:pic>
+        <p:nvPicPr>
+          <p:cNvPr id="15" name="Picture 14" descr="A grey rectangular object with a black border&#10;&#10;Description automatically generated">
+            <a:extLst>
+              <a:ext uri="{FF2B5EF4-FFF2-40B4-BE49-F238E27FC236}">
+                <a16:creationId xmlns:a16="http://schemas.microsoft.com/office/drawing/2014/main" id="{162A8402-A5A5-E394-6EA1-52704C2CF862}"/>
+              </a:ext>
+            </a:extLst>
+          </p:cNvPr>
+          <p:cNvPicPr>
+            <a:picLocks noChangeAspect="1"/>
+          </p:cNvPicPr>
+          <p:nvPr/>
+        </p:nvPicPr>
+        <p:blipFill>
+          <a:blip r:embed="rId2"/>
+          <a:stretch>
+            <a:fillRect/>
+          </a:stretch>
+        </p:blipFill>
+        <p:spPr>
+          <a:xfrm>
+            <a:off x="8726091" y="65146"/>
+            <a:ext cx="974921" cy="1371600"/>
+          </a:xfrm>
+          <a:prstGeom prst="rect">
+            <a:avLst/>
+          </a:prstGeom>
+        </p:spPr>
+      </p:pic>
+      <p:pic>
+        <p:nvPicPr>
+          <p:cNvPr id="21" name="Picture 20" descr="A grey rectangular object with a black border&#10;&#10;Description automatically generated">
+            <a:extLst>
+              <a:ext uri="{FF2B5EF4-FFF2-40B4-BE49-F238E27FC236}">
+                <a16:creationId xmlns:a16="http://schemas.microsoft.com/office/drawing/2014/main" id="{2CFE995B-AE1D-5899-5537-36F061C9F795}"/>
+              </a:ext>
+            </a:extLst>
+          </p:cNvPr>
+          <p:cNvPicPr>
+            <a:picLocks noChangeAspect="1"/>
+          </p:cNvPicPr>
+          <p:nvPr/>
+        </p:nvPicPr>
+        <p:blipFill>
+          <a:blip r:embed="rId2"/>
+          <a:stretch>
+            <a:fillRect/>
+          </a:stretch>
+        </p:blipFill>
+        <p:spPr>
+          <a:xfrm>
+            <a:off x="909004" y="1403252"/>
+            <a:ext cx="974921" cy="1371600"/>
+          </a:xfrm>
+          <a:prstGeom prst="rect">
+            <a:avLst/>
+          </a:prstGeom>
+        </p:spPr>
+      </p:pic>
+      <p:pic>
+        <p:nvPicPr>
+          <p:cNvPr id="22" name="Picture 21" descr="A grey rectangular object with a black border&#10;&#10;Description automatically generated">
+            <a:extLst>
+              <a:ext uri="{FF2B5EF4-FFF2-40B4-BE49-F238E27FC236}">
+                <a16:creationId xmlns:a16="http://schemas.microsoft.com/office/drawing/2014/main" id="{490C3BDB-37E8-888D-975F-C43B127A2519}"/>
+              </a:ext>
+            </a:extLst>
+          </p:cNvPr>
+          <p:cNvPicPr>
+            <a:picLocks noChangeAspect="1"/>
+          </p:cNvPicPr>
+          <p:nvPr/>
+        </p:nvPicPr>
+        <p:blipFill>
+          <a:blip r:embed="rId2"/>
+          <a:stretch>
+            <a:fillRect/>
+          </a:stretch>
+        </p:blipFill>
+        <p:spPr>
+          <a:xfrm>
+            <a:off x="1886153" y="1403252"/>
+            <a:ext cx="974921" cy="1371600"/>
+          </a:xfrm>
+          <a:prstGeom prst="rect">
+            <a:avLst/>
+          </a:prstGeom>
+        </p:spPr>
+      </p:pic>
+      <p:pic>
+        <p:nvPicPr>
+          <p:cNvPr id="24" name="Picture 23" descr="A grey rectangular object with a black border&#10;&#10;Description automatically generated">
+            <a:extLst>
+              <a:ext uri="{FF2B5EF4-FFF2-40B4-BE49-F238E27FC236}">
+                <a16:creationId xmlns:a16="http://schemas.microsoft.com/office/drawing/2014/main" id="{FB49BBEC-72DA-5A6C-5F95-C97F879C6527}"/>
+              </a:ext>
+            </a:extLst>
+          </p:cNvPr>
+          <p:cNvPicPr>
+            <a:picLocks noChangeAspect="1"/>
+          </p:cNvPicPr>
+          <p:nvPr/>
+        </p:nvPicPr>
+        <p:blipFill>
+          <a:blip r:embed="rId2"/>
+          <a:stretch>
+            <a:fillRect/>
+          </a:stretch>
+        </p:blipFill>
+        <p:spPr>
+          <a:xfrm>
+            <a:off x="3838225" y="1403252"/>
+            <a:ext cx="974921" cy="1371600"/>
+          </a:xfrm>
+          <a:prstGeom prst="rect">
+            <a:avLst/>
+          </a:prstGeom>
+        </p:spPr>
+      </p:pic>
+      <p:pic>
+        <p:nvPicPr>
+          <p:cNvPr id="25" name="Picture 24" descr="A grey rectangular object with a black border&#10;&#10;Description automatically generated">
+            <a:extLst>
+              <a:ext uri="{FF2B5EF4-FFF2-40B4-BE49-F238E27FC236}">
+                <a16:creationId xmlns:a16="http://schemas.microsoft.com/office/drawing/2014/main" id="{2A4B7AE4-B350-95A0-3A58-0D9D756EA547}"/>
+              </a:ext>
+            </a:extLst>
+          </p:cNvPr>
+          <p:cNvPicPr>
+            <a:picLocks noChangeAspect="1"/>
+          </p:cNvPicPr>
+          <p:nvPr/>
+        </p:nvPicPr>
+        <p:blipFill>
+          <a:blip r:embed="rId2"/>
+          <a:stretch>
+            <a:fillRect/>
+          </a:stretch>
+        </p:blipFill>
+        <p:spPr>
+          <a:xfrm>
+            <a:off x="4813148" y="1408563"/>
+            <a:ext cx="974921" cy="1371600"/>
+          </a:xfrm>
+          <a:prstGeom prst="rect">
+            <a:avLst/>
+          </a:prstGeom>
+        </p:spPr>
+      </p:pic>
+      <p:pic>
+        <p:nvPicPr>
+          <p:cNvPr id="26" name="Picture 25" descr="A grey rectangular object with a black border&#10;&#10;Description automatically generated">
+            <a:extLst>
+              <a:ext uri="{FF2B5EF4-FFF2-40B4-BE49-F238E27FC236}">
+                <a16:creationId xmlns:a16="http://schemas.microsoft.com/office/drawing/2014/main" id="{23122C44-E8E8-2B1A-4890-5E375F0CCDC1}"/>
+              </a:ext>
+            </a:extLst>
+          </p:cNvPr>
+          <p:cNvPicPr>
+            <a:picLocks noChangeAspect="1"/>
+          </p:cNvPicPr>
+          <p:nvPr/>
+        </p:nvPicPr>
+        <p:blipFill>
+          <a:blip r:embed="rId2"/>
+          <a:stretch>
+            <a:fillRect/>
+          </a:stretch>
+        </p:blipFill>
+        <p:spPr>
+          <a:xfrm>
+            <a:off x="5790299" y="1413874"/>
+            <a:ext cx="974921" cy="1371600"/>
+          </a:xfrm>
+          <a:prstGeom prst="rect">
+            <a:avLst/>
+          </a:prstGeom>
+        </p:spPr>
+      </p:pic>
+      <p:pic>
+        <p:nvPicPr>
+          <p:cNvPr id="27" name="Picture 26" descr="A grey rectangular object with a black border&#10;&#10;Description automatically generated">
+            <a:extLst>
+              <a:ext uri="{FF2B5EF4-FFF2-40B4-BE49-F238E27FC236}">
+                <a16:creationId xmlns:a16="http://schemas.microsoft.com/office/drawing/2014/main" id="{B831B44F-3B49-B219-E203-C1353CDF26A8}"/>
+              </a:ext>
+            </a:extLst>
+          </p:cNvPr>
+          <p:cNvPicPr>
+            <a:picLocks noChangeAspect="1"/>
+          </p:cNvPicPr>
+          <p:nvPr/>
+        </p:nvPicPr>
+        <p:blipFill>
+          <a:blip r:embed="rId2"/>
+          <a:stretch>
+            <a:fillRect/>
+          </a:stretch>
+        </p:blipFill>
+        <p:spPr>
+          <a:xfrm>
+            <a:off x="9712039" y="1413874"/>
+            <a:ext cx="974921" cy="1371600"/>
+          </a:xfrm>
+          <a:prstGeom prst="rect">
+            <a:avLst/>
+          </a:prstGeom>
+        </p:spPr>
+      </p:pic>
+      <p:pic>
+        <p:nvPicPr>
+          <p:cNvPr id="28" name="Picture 27" descr="A grey rectangular object with a black border&#10;&#10;Description automatically generated">
+            <a:extLst>
+              <a:ext uri="{FF2B5EF4-FFF2-40B4-BE49-F238E27FC236}">
+                <a16:creationId xmlns:a16="http://schemas.microsoft.com/office/drawing/2014/main" id="{51ECEFC4-83F1-988C-9271-392533F4A26E}"/>
+              </a:ext>
+            </a:extLst>
+          </p:cNvPr>
+          <p:cNvPicPr>
+            <a:picLocks noChangeAspect="1"/>
+          </p:cNvPicPr>
+          <p:nvPr/>
+        </p:nvPicPr>
+        <p:blipFill>
+          <a:blip r:embed="rId2"/>
+          <a:stretch>
+            <a:fillRect/>
+          </a:stretch>
+        </p:blipFill>
+        <p:spPr>
+          <a:xfrm>
+            <a:off x="6765222" y="1413874"/>
+            <a:ext cx="974921" cy="1371600"/>
+          </a:xfrm>
+          <a:prstGeom prst="rect">
+            <a:avLst/>
+          </a:prstGeom>
+        </p:spPr>
+      </p:pic>
+      <p:pic>
+        <p:nvPicPr>
+          <p:cNvPr id="29" name="Picture 28" descr="A grey rectangular object with a black border&#10;&#10;Description automatically generated">
+            <a:extLst>
+              <a:ext uri="{FF2B5EF4-FFF2-40B4-BE49-F238E27FC236}">
+                <a16:creationId xmlns:a16="http://schemas.microsoft.com/office/drawing/2014/main" id="{E2794A55-0441-39B4-66A1-C3E4408B84C6}"/>
+              </a:ext>
+            </a:extLst>
+          </p:cNvPr>
+          <p:cNvPicPr>
+            <a:picLocks noChangeAspect="1"/>
+          </p:cNvPicPr>
+          <p:nvPr/>
+        </p:nvPicPr>
+        <p:blipFill>
+          <a:blip r:embed="rId2"/>
+          <a:stretch>
+            <a:fillRect/>
+          </a:stretch>
+        </p:blipFill>
+        <p:spPr>
+          <a:xfrm>
+            <a:off x="7740143" y="1413874"/>
+            <a:ext cx="974921" cy="1371600"/>
+          </a:xfrm>
+          <a:prstGeom prst="rect">
+            <a:avLst/>
+          </a:prstGeom>
+        </p:spPr>
+      </p:pic>
+      <p:pic>
+        <p:nvPicPr>
+          <p:cNvPr id="30" name="Picture 29" descr="A grey rectangular object with a black border&#10;&#10;Description automatically generated">
+            <a:extLst>
+              <a:ext uri="{FF2B5EF4-FFF2-40B4-BE49-F238E27FC236}">
+                <a16:creationId xmlns:a16="http://schemas.microsoft.com/office/drawing/2014/main" id="{56C81532-3F3B-3ECD-6E44-F64949B8237D}"/>
+              </a:ext>
+            </a:extLst>
+          </p:cNvPr>
+          <p:cNvPicPr>
+            <a:picLocks noChangeAspect="1"/>
+          </p:cNvPicPr>
+          <p:nvPr/>
+        </p:nvPicPr>
+        <p:blipFill>
+          <a:blip r:embed="rId2"/>
+          <a:stretch>
+            <a:fillRect/>
+          </a:stretch>
+        </p:blipFill>
+        <p:spPr>
+          <a:xfrm>
+            <a:off x="8726091" y="1413874"/>
+            <a:ext cx="974921" cy="1371600"/>
+          </a:xfrm>
+          <a:prstGeom prst="rect">
+            <a:avLst/>
+          </a:prstGeom>
+        </p:spPr>
+      </p:pic>
+      <p:pic>
+        <p:nvPicPr>
+          <p:cNvPr id="31" name="Picture 30" descr="A grey rectangular object with a black border&#10;&#10;Description automatically generated">
+            <a:extLst>
+              <a:ext uri="{FF2B5EF4-FFF2-40B4-BE49-F238E27FC236}">
+                <a16:creationId xmlns:a16="http://schemas.microsoft.com/office/drawing/2014/main" id="{9749E6F9-0927-EFDC-B668-A2F0055F6C9A}"/>
+              </a:ext>
+            </a:extLst>
+          </p:cNvPr>
+          <p:cNvPicPr>
+            <a:picLocks noChangeAspect="1"/>
+          </p:cNvPicPr>
+          <p:nvPr/>
+        </p:nvPicPr>
+        <p:blipFill>
+          <a:blip r:embed="rId2"/>
+          <a:stretch>
+            <a:fillRect/>
+          </a:stretch>
+        </p:blipFill>
+        <p:spPr>
+          <a:xfrm>
+            <a:off x="909004" y="2766071"/>
+            <a:ext cx="974921" cy="1371600"/>
+          </a:xfrm>
+          <a:prstGeom prst="rect">
+            <a:avLst/>
+          </a:prstGeom>
+        </p:spPr>
+      </p:pic>
+      <p:pic>
+        <p:nvPicPr>
+          <p:cNvPr id="32" name="Picture 31" descr="A grey rectangular object with a black border&#10;&#10;Description automatically generated">
+            <a:extLst>
+              <a:ext uri="{FF2B5EF4-FFF2-40B4-BE49-F238E27FC236}">
+                <a16:creationId xmlns:a16="http://schemas.microsoft.com/office/drawing/2014/main" id="{6402ED63-2250-C744-D02D-B822C314AE9A}"/>
+              </a:ext>
+            </a:extLst>
+          </p:cNvPr>
+          <p:cNvPicPr>
+            <a:picLocks noChangeAspect="1"/>
+          </p:cNvPicPr>
+          <p:nvPr/>
+        </p:nvPicPr>
+        <p:blipFill>
+          <a:blip r:embed="rId2"/>
+          <a:stretch>
+            <a:fillRect/>
+          </a:stretch>
+        </p:blipFill>
+        <p:spPr>
+          <a:xfrm>
+            <a:off x="1886153" y="2766071"/>
+            <a:ext cx="974921" cy="1371600"/>
+          </a:xfrm>
+          <a:prstGeom prst="rect">
+            <a:avLst/>
+          </a:prstGeom>
+        </p:spPr>
+      </p:pic>
+      <p:pic>
+        <p:nvPicPr>
+          <p:cNvPr id="33" name="Picture 32" descr="A grey rectangular object with a black border&#10;&#10;Description automatically generated">
+            <a:extLst>
+              <a:ext uri="{FF2B5EF4-FFF2-40B4-BE49-F238E27FC236}">
+                <a16:creationId xmlns:a16="http://schemas.microsoft.com/office/drawing/2014/main" id="{648735D8-9566-BB01-6E1C-D060D8DAEF9F}"/>
+              </a:ext>
+            </a:extLst>
+          </p:cNvPr>
+          <p:cNvPicPr>
+            <a:picLocks noChangeAspect="1"/>
+          </p:cNvPicPr>
+          <p:nvPr/>
+        </p:nvPicPr>
+        <p:blipFill>
+          <a:blip r:embed="rId2"/>
+          <a:stretch>
+            <a:fillRect/>
+          </a:stretch>
+        </p:blipFill>
+        <p:spPr>
+          <a:xfrm>
+            <a:off x="2861076" y="2766071"/>
+            <a:ext cx="974921" cy="1371600"/>
+          </a:xfrm>
+          <a:prstGeom prst="rect">
+            <a:avLst/>
+          </a:prstGeom>
+        </p:spPr>
+      </p:pic>
+      <p:pic>
+        <p:nvPicPr>
+          <p:cNvPr id="35" name="Picture 34" descr="A grey rectangular object with a black border&#10;&#10;Description automatically generated">
+            <a:extLst>
+              <a:ext uri="{FF2B5EF4-FFF2-40B4-BE49-F238E27FC236}">
+                <a16:creationId xmlns:a16="http://schemas.microsoft.com/office/drawing/2014/main" id="{F1CC46E8-D9A7-C158-4D93-7140A9BF590E}"/>
+              </a:ext>
+            </a:extLst>
+          </p:cNvPr>
+          <p:cNvPicPr>
+            <a:picLocks noChangeAspect="1"/>
+          </p:cNvPicPr>
+          <p:nvPr/>
+        </p:nvPicPr>
+        <p:blipFill>
+          <a:blip r:embed="rId2"/>
+          <a:stretch>
+            <a:fillRect/>
+          </a:stretch>
+        </p:blipFill>
+        <p:spPr>
+          <a:xfrm>
+            <a:off x="4813148" y="2771382"/>
+            <a:ext cx="974921" cy="1371600"/>
+          </a:xfrm>
+          <a:prstGeom prst="rect">
+            <a:avLst/>
+          </a:prstGeom>
+        </p:spPr>
+      </p:pic>
+      <p:pic>
+        <p:nvPicPr>
+          <p:cNvPr id="36" name="Picture 35" descr="A grey rectangular object with a black border&#10;&#10;Description automatically generated">
+            <a:extLst>
+              <a:ext uri="{FF2B5EF4-FFF2-40B4-BE49-F238E27FC236}">
+                <a16:creationId xmlns:a16="http://schemas.microsoft.com/office/drawing/2014/main" id="{D1D2C2D2-92CB-367F-2FFC-D88C7F06DDE7}"/>
+              </a:ext>
+            </a:extLst>
+          </p:cNvPr>
+          <p:cNvPicPr>
+            <a:picLocks noChangeAspect="1"/>
+          </p:cNvPicPr>
+          <p:nvPr/>
+        </p:nvPicPr>
+        <p:blipFill>
+          <a:blip r:embed="rId2"/>
+          <a:stretch>
+            <a:fillRect/>
+          </a:stretch>
+        </p:blipFill>
+        <p:spPr>
+          <a:xfrm>
+            <a:off x="3839340" y="2752794"/>
+            <a:ext cx="974921" cy="1371600"/>
+          </a:xfrm>
+          <a:prstGeom prst="rect">
+            <a:avLst/>
+          </a:prstGeom>
+        </p:spPr>
+      </p:pic>
+      <p:pic>
+        <p:nvPicPr>
+          <p:cNvPr id="37" name="Picture 36" descr="A grey rectangular object with a black border&#10;&#10;Description automatically generated">
+            <a:extLst>
+              <a:ext uri="{FF2B5EF4-FFF2-40B4-BE49-F238E27FC236}">
+                <a16:creationId xmlns:a16="http://schemas.microsoft.com/office/drawing/2014/main" id="{18A9BC1E-4A35-8DD6-7F6A-79DBDDA60286}"/>
+              </a:ext>
+            </a:extLst>
+          </p:cNvPr>
+          <p:cNvPicPr>
+            <a:picLocks noChangeAspect="1"/>
+          </p:cNvPicPr>
+          <p:nvPr/>
+        </p:nvPicPr>
+        <p:blipFill>
+          <a:blip r:embed="rId2"/>
+          <a:stretch>
+            <a:fillRect/>
+          </a:stretch>
+        </p:blipFill>
+        <p:spPr>
+          <a:xfrm>
+            <a:off x="9712039" y="2776693"/>
+            <a:ext cx="974921" cy="1371600"/>
+          </a:xfrm>
+          <a:prstGeom prst="rect">
+            <a:avLst/>
+          </a:prstGeom>
+        </p:spPr>
+      </p:pic>
+      <p:pic>
+        <p:nvPicPr>
+          <p:cNvPr id="38" name="Picture 37" descr="A grey rectangular object with a black border&#10;&#10;Description automatically generated">
+            <a:extLst>
+              <a:ext uri="{FF2B5EF4-FFF2-40B4-BE49-F238E27FC236}">
+                <a16:creationId xmlns:a16="http://schemas.microsoft.com/office/drawing/2014/main" id="{946C6021-8E79-3B78-E5AD-143076CDF6B9}"/>
+              </a:ext>
+            </a:extLst>
+          </p:cNvPr>
+          <p:cNvPicPr>
+            <a:picLocks noChangeAspect="1"/>
+          </p:cNvPicPr>
+          <p:nvPr/>
+        </p:nvPicPr>
+        <p:blipFill>
+          <a:blip r:embed="rId2"/>
+          <a:stretch>
+            <a:fillRect/>
+          </a:stretch>
+        </p:blipFill>
+        <p:spPr>
+          <a:xfrm>
+            <a:off x="6765222" y="2776693"/>
+            <a:ext cx="974921" cy="1371600"/>
+          </a:xfrm>
+          <a:prstGeom prst="rect">
+            <a:avLst/>
+          </a:prstGeom>
+        </p:spPr>
+      </p:pic>
+      <p:pic>
+        <p:nvPicPr>
+          <p:cNvPr id="39" name="Picture 38" descr="A grey rectangular object with a black border&#10;&#10;Description automatically generated">
+            <a:extLst>
+              <a:ext uri="{FF2B5EF4-FFF2-40B4-BE49-F238E27FC236}">
+                <a16:creationId xmlns:a16="http://schemas.microsoft.com/office/drawing/2014/main" id="{194DBA48-A897-CAD3-3FE8-66BFB53E6294}"/>
+              </a:ext>
+            </a:extLst>
+          </p:cNvPr>
+          <p:cNvPicPr>
+            <a:picLocks noChangeAspect="1"/>
+          </p:cNvPicPr>
+          <p:nvPr/>
+        </p:nvPicPr>
+        <p:blipFill>
+          <a:blip r:embed="rId2"/>
+          <a:stretch>
+            <a:fillRect/>
+          </a:stretch>
+        </p:blipFill>
+        <p:spPr>
+          <a:xfrm>
+            <a:off x="7740143" y="2776693"/>
+            <a:ext cx="974921" cy="1371600"/>
+          </a:xfrm>
+          <a:prstGeom prst="rect">
+            <a:avLst/>
+          </a:prstGeom>
+        </p:spPr>
+      </p:pic>
+      <p:pic>
+        <p:nvPicPr>
+          <p:cNvPr id="40" name="Picture 39" descr="A grey rectangular object with a black border&#10;&#10;Description automatically generated">
+            <a:extLst>
+              <a:ext uri="{FF2B5EF4-FFF2-40B4-BE49-F238E27FC236}">
+                <a16:creationId xmlns:a16="http://schemas.microsoft.com/office/drawing/2014/main" id="{BAE2746A-D9E6-D9AF-A74A-54BE1E58255C}"/>
+              </a:ext>
+            </a:extLst>
+          </p:cNvPr>
+          <p:cNvPicPr>
+            <a:picLocks noChangeAspect="1"/>
+          </p:cNvPicPr>
+          <p:nvPr/>
+        </p:nvPicPr>
+        <p:blipFill>
+          <a:blip r:embed="rId2"/>
+          <a:stretch>
+            <a:fillRect/>
+          </a:stretch>
+        </p:blipFill>
+        <p:spPr>
+          <a:xfrm>
+            <a:off x="8726091" y="2776693"/>
+            <a:ext cx="974921" cy="1371600"/>
+          </a:xfrm>
+          <a:prstGeom prst="rect">
+            <a:avLst/>
+          </a:prstGeom>
+        </p:spPr>
+      </p:pic>
+      <p:pic>
+        <p:nvPicPr>
+          <p:cNvPr id="41" name="Picture 40" descr="A grey rectangular object with a black border&#10;&#10;Description automatically generated">
+            <a:extLst>
+              <a:ext uri="{FF2B5EF4-FFF2-40B4-BE49-F238E27FC236}">
+                <a16:creationId xmlns:a16="http://schemas.microsoft.com/office/drawing/2014/main" id="{91F61E5D-15E0-3CC1-43A6-3C1B0CC03BD2}"/>
+              </a:ext>
+            </a:extLst>
+          </p:cNvPr>
+          <p:cNvPicPr>
+            <a:picLocks noChangeAspect="1"/>
+          </p:cNvPicPr>
+          <p:nvPr/>
+        </p:nvPicPr>
+        <p:blipFill>
+          <a:blip r:embed="rId2"/>
+          <a:stretch>
+            <a:fillRect/>
+          </a:stretch>
+        </p:blipFill>
+        <p:spPr>
+          <a:xfrm>
+            <a:off x="909004" y="4104177"/>
+            <a:ext cx="974921" cy="1371600"/>
+          </a:xfrm>
+          <a:prstGeom prst="rect">
+            <a:avLst/>
+          </a:prstGeom>
+        </p:spPr>
+      </p:pic>
+      <p:pic>
+        <p:nvPicPr>
+          <p:cNvPr id="42" name="Picture 41" descr="A grey rectangular object with a black border&#10;&#10;Description automatically generated">
+            <a:extLst>
+              <a:ext uri="{FF2B5EF4-FFF2-40B4-BE49-F238E27FC236}">
+                <a16:creationId xmlns:a16="http://schemas.microsoft.com/office/drawing/2014/main" id="{A05D2AF2-EDD6-B92C-8893-C5B4E16B1730}"/>
+              </a:ext>
+            </a:extLst>
+          </p:cNvPr>
+          <p:cNvPicPr>
+            <a:picLocks noChangeAspect="1"/>
+          </p:cNvPicPr>
+          <p:nvPr/>
+        </p:nvPicPr>
+        <p:blipFill>
+          <a:blip r:embed="rId2"/>
+          <a:stretch>
+            <a:fillRect/>
+          </a:stretch>
+        </p:blipFill>
+        <p:spPr>
+          <a:xfrm>
+            <a:off x="1886153" y="4104177"/>
+            <a:ext cx="974921" cy="1371600"/>
+          </a:xfrm>
+          <a:prstGeom prst="rect">
+            <a:avLst/>
+          </a:prstGeom>
+        </p:spPr>
+      </p:pic>
+      <p:pic>
+        <p:nvPicPr>
+          <p:cNvPr id="43" name="Picture 42" descr="A grey rectangular object with a black border&#10;&#10;Description automatically generated">
+            <a:extLst>
+              <a:ext uri="{FF2B5EF4-FFF2-40B4-BE49-F238E27FC236}">
+                <a16:creationId xmlns:a16="http://schemas.microsoft.com/office/drawing/2014/main" id="{D2F5141E-E702-5E79-B198-86E4C15EA462}"/>
+              </a:ext>
+            </a:extLst>
+          </p:cNvPr>
+          <p:cNvPicPr>
+            <a:picLocks noChangeAspect="1"/>
+          </p:cNvPicPr>
+          <p:nvPr/>
+        </p:nvPicPr>
+        <p:blipFill>
+          <a:blip r:embed="rId2"/>
+          <a:stretch>
+            <a:fillRect/>
+          </a:stretch>
+        </p:blipFill>
+        <p:spPr>
+          <a:xfrm>
+            <a:off x="2861076" y="4104177"/>
+            <a:ext cx="974921" cy="1371600"/>
+          </a:xfrm>
+          <a:prstGeom prst="rect">
+            <a:avLst/>
+          </a:prstGeom>
+        </p:spPr>
+      </p:pic>
+      <p:pic>
+        <p:nvPicPr>
+          <p:cNvPr id="44" name="Picture 43" descr="A grey rectangular object with a black border&#10;&#10;Description automatically generated">
+            <a:extLst>
+              <a:ext uri="{FF2B5EF4-FFF2-40B4-BE49-F238E27FC236}">
+                <a16:creationId xmlns:a16="http://schemas.microsoft.com/office/drawing/2014/main" id="{2F095AAE-ED2E-2F89-027E-BBD4D859C215}"/>
+              </a:ext>
+            </a:extLst>
+          </p:cNvPr>
+          <p:cNvPicPr>
+            <a:picLocks noChangeAspect="1"/>
+          </p:cNvPicPr>
+          <p:nvPr/>
+        </p:nvPicPr>
+        <p:blipFill>
+          <a:blip r:embed="rId2"/>
+          <a:stretch>
+            <a:fillRect/>
+          </a:stretch>
+        </p:blipFill>
+        <p:spPr>
+          <a:xfrm>
+            <a:off x="3835997" y="4104177"/>
+            <a:ext cx="974921" cy="1371600"/>
+          </a:xfrm>
+          <a:prstGeom prst="rect">
+            <a:avLst/>
+          </a:prstGeom>
+        </p:spPr>
+      </p:pic>
+      <p:pic>
+        <p:nvPicPr>
+          <p:cNvPr id="45" name="Picture 44" descr="A grey rectangular object with a black border&#10;&#10;Description automatically generated">
+            <a:extLst>
+              <a:ext uri="{FF2B5EF4-FFF2-40B4-BE49-F238E27FC236}">
+                <a16:creationId xmlns:a16="http://schemas.microsoft.com/office/drawing/2014/main" id="{8856D5B0-165A-7DAD-4D78-CAD2B6A03DDE}"/>
+              </a:ext>
+            </a:extLst>
+          </p:cNvPr>
+          <p:cNvPicPr>
+            <a:picLocks noChangeAspect="1"/>
+          </p:cNvPicPr>
+          <p:nvPr/>
+        </p:nvPicPr>
+        <p:blipFill>
+          <a:blip r:embed="rId2"/>
+          <a:stretch>
+            <a:fillRect/>
+          </a:stretch>
+        </p:blipFill>
+        <p:spPr>
+          <a:xfrm>
+            <a:off x="4813148" y="4109488"/>
+            <a:ext cx="974921" cy="1371600"/>
+          </a:xfrm>
+          <a:prstGeom prst="rect">
+            <a:avLst/>
+          </a:prstGeom>
+        </p:spPr>
+      </p:pic>
+      <p:pic>
+        <p:nvPicPr>
+          <p:cNvPr id="46" name="Picture 45" descr="A grey rectangular object with a black border&#10;&#10;Description automatically generated">
+            <a:extLst>
+              <a:ext uri="{FF2B5EF4-FFF2-40B4-BE49-F238E27FC236}">
+                <a16:creationId xmlns:a16="http://schemas.microsoft.com/office/drawing/2014/main" id="{894FFF18-6B7C-F2CD-CEC7-89683BFDA488}"/>
+              </a:ext>
+            </a:extLst>
+          </p:cNvPr>
+          <p:cNvPicPr>
+            <a:picLocks noChangeAspect="1"/>
+          </p:cNvPicPr>
+          <p:nvPr/>
+        </p:nvPicPr>
+        <p:blipFill>
+          <a:blip r:embed="rId2"/>
+          <a:stretch>
+            <a:fillRect/>
+          </a:stretch>
+        </p:blipFill>
+        <p:spPr>
+          <a:xfrm>
+            <a:off x="5790299" y="4114799"/>
+            <a:ext cx="974921" cy="1371600"/>
+          </a:xfrm>
+          <a:prstGeom prst="rect">
+            <a:avLst/>
+          </a:prstGeom>
+        </p:spPr>
+      </p:pic>
+      <p:pic>
+        <p:nvPicPr>
+          <p:cNvPr id="47" name="Picture 46" descr="A grey rectangular object with a black border&#10;&#10;Description automatically generated">
+            <a:extLst>
+              <a:ext uri="{FF2B5EF4-FFF2-40B4-BE49-F238E27FC236}">
+                <a16:creationId xmlns:a16="http://schemas.microsoft.com/office/drawing/2014/main" id="{6C530AD9-AB7B-1DAD-4FB1-F577D8CC3BFD}"/>
+              </a:ext>
+            </a:extLst>
+          </p:cNvPr>
+          <p:cNvPicPr>
+            <a:picLocks noChangeAspect="1"/>
+          </p:cNvPicPr>
+          <p:nvPr/>
+        </p:nvPicPr>
+        <p:blipFill>
+          <a:blip r:embed="rId2"/>
+          <a:stretch>
+            <a:fillRect/>
+          </a:stretch>
+        </p:blipFill>
+        <p:spPr>
+          <a:xfrm>
+            <a:off x="9712039" y="4114799"/>
+            <a:ext cx="974921" cy="1371600"/>
+          </a:xfrm>
+          <a:prstGeom prst="rect">
+            <a:avLst/>
+          </a:prstGeom>
+        </p:spPr>
+      </p:pic>
+      <p:pic>
+        <p:nvPicPr>
+          <p:cNvPr id="48" name="Picture 47" descr="A grey rectangular object with a black border&#10;&#10;Description automatically generated">
+            <a:extLst>
+              <a:ext uri="{FF2B5EF4-FFF2-40B4-BE49-F238E27FC236}">
+                <a16:creationId xmlns:a16="http://schemas.microsoft.com/office/drawing/2014/main" id="{2C173ECB-6A98-E079-A443-2A2F77846572}"/>
+              </a:ext>
+            </a:extLst>
+          </p:cNvPr>
+          <p:cNvPicPr>
+            <a:picLocks noChangeAspect="1"/>
+          </p:cNvPicPr>
+          <p:nvPr/>
+        </p:nvPicPr>
+        <p:blipFill>
+          <a:blip r:embed="rId2"/>
+          <a:stretch>
+            <a:fillRect/>
+          </a:stretch>
+        </p:blipFill>
+        <p:spPr>
+          <a:xfrm>
+            <a:off x="6765222" y="4114799"/>
+            <a:ext cx="974921" cy="1371600"/>
+          </a:xfrm>
+          <a:prstGeom prst="rect">
+            <a:avLst/>
+          </a:prstGeom>
+        </p:spPr>
+      </p:pic>
+      <p:pic>
+        <p:nvPicPr>
+          <p:cNvPr id="49" name="Picture 48" descr="A grey rectangular object with a black border&#10;&#10;Description automatically generated">
+            <a:extLst>
+              <a:ext uri="{FF2B5EF4-FFF2-40B4-BE49-F238E27FC236}">
+                <a16:creationId xmlns:a16="http://schemas.microsoft.com/office/drawing/2014/main" id="{B6786296-048C-CD78-1F19-DE0DEBAD9A3E}"/>
+              </a:ext>
+            </a:extLst>
+          </p:cNvPr>
+          <p:cNvPicPr>
+            <a:picLocks noChangeAspect="1"/>
+          </p:cNvPicPr>
+          <p:nvPr/>
+        </p:nvPicPr>
+        <p:blipFill>
+          <a:blip r:embed="rId2"/>
+          <a:stretch>
+            <a:fillRect/>
+          </a:stretch>
+        </p:blipFill>
+        <p:spPr>
+          <a:xfrm>
+            <a:off x="7740143" y="4114799"/>
+            <a:ext cx="974921" cy="1371600"/>
+          </a:xfrm>
+          <a:prstGeom prst="rect">
+            <a:avLst/>
+          </a:prstGeom>
+        </p:spPr>
+      </p:pic>
+      <p:pic>
+        <p:nvPicPr>
+          <p:cNvPr id="50" name="Picture 49" descr="A grey rectangular object with a black border&#10;&#10;Description automatically generated">
+            <a:extLst>
+              <a:ext uri="{FF2B5EF4-FFF2-40B4-BE49-F238E27FC236}">
+                <a16:creationId xmlns:a16="http://schemas.microsoft.com/office/drawing/2014/main" id="{38EC8817-6014-C646-5DAB-69302FA813A8}"/>
+              </a:ext>
+            </a:extLst>
+          </p:cNvPr>
+          <p:cNvPicPr>
+            <a:picLocks noChangeAspect="1"/>
+          </p:cNvPicPr>
+          <p:nvPr/>
+        </p:nvPicPr>
+        <p:blipFill>
+          <a:blip r:embed="rId2"/>
+          <a:stretch>
+            <a:fillRect/>
+          </a:stretch>
+        </p:blipFill>
+        <p:spPr>
+          <a:xfrm>
+            <a:off x="8726091" y="4114799"/>
+            <a:ext cx="974921" cy="1371600"/>
+          </a:xfrm>
+          <a:prstGeom prst="rect">
+            <a:avLst/>
+          </a:prstGeom>
+        </p:spPr>
+      </p:pic>
+      <p:pic>
+        <p:nvPicPr>
+          <p:cNvPr id="51" name="Picture 50" descr="A grey rectangular object with a black border&#10;&#10;Description automatically generated">
+            <a:extLst>
+              <a:ext uri="{FF2B5EF4-FFF2-40B4-BE49-F238E27FC236}">
+                <a16:creationId xmlns:a16="http://schemas.microsoft.com/office/drawing/2014/main" id="{F83C77D3-FE5B-A368-5917-F4411A8737F4}"/>
+              </a:ext>
+            </a:extLst>
+          </p:cNvPr>
+          <p:cNvPicPr>
+            <a:picLocks noChangeAspect="1"/>
+          </p:cNvPicPr>
+          <p:nvPr/>
+        </p:nvPicPr>
+        <p:blipFill>
+          <a:blip r:embed="rId2"/>
+          <a:stretch>
+            <a:fillRect/>
+          </a:stretch>
+        </p:blipFill>
+        <p:spPr>
+          <a:xfrm>
+            <a:off x="909004" y="5426350"/>
+            <a:ext cx="974921" cy="1371600"/>
+          </a:xfrm>
+          <a:prstGeom prst="rect">
+            <a:avLst/>
+          </a:prstGeom>
+        </p:spPr>
+      </p:pic>
+      <p:pic>
+        <p:nvPicPr>
+          <p:cNvPr id="52" name="Picture 51" descr="A grey rectangular object with a black border&#10;&#10;Description automatically generated">
+            <a:extLst>
+              <a:ext uri="{FF2B5EF4-FFF2-40B4-BE49-F238E27FC236}">
+                <a16:creationId xmlns:a16="http://schemas.microsoft.com/office/drawing/2014/main" id="{65A96E18-9601-19D3-1605-8EFC6FE27A49}"/>
+              </a:ext>
+            </a:extLst>
+          </p:cNvPr>
+          <p:cNvPicPr>
+            <a:picLocks noChangeAspect="1"/>
+          </p:cNvPicPr>
+          <p:nvPr/>
+        </p:nvPicPr>
+        <p:blipFill>
+          <a:blip r:embed="rId2"/>
+          <a:stretch>
+            <a:fillRect/>
+          </a:stretch>
+        </p:blipFill>
+        <p:spPr>
+          <a:xfrm>
+            <a:off x="1886153" y="5426350"/>
+            <a:ext cx="974921" cy="1371600"/>
+          </a:xfrm>
+          <a:prstGeom prst="rect">
+            <a:avLst/>
+          </a:prstGeom>
+        </p:spPr>
+      </p:pic>
+      <p:pic>
+        <p:nvPicPr>
+          <p:cNvPr id="53" name="Picture 52" descr="A grey rectangular object with a black border&#10;&#10;Description automatically generated">
+            <a:extLst>
+              <a:ext uri="{FF2B5EF4-FFF2-40B4-BE49-F238E27FC236}">
+                <a16:creationId xmlns:a16="http://schemas.microsoft.com/office/drawing/2014/main" id="{D081945E-4380-FFB2-C833-E8E54D3DB444}"/>
+              </a:ext>
+            </a:extLst>
+          </p:cNvPr>
+          <p:cNvPicPr>
+            <a:picLocks noChangeAspect="1"/>
+          </p:cNvPicPr>
+          <p:nvPr/>
+        </p:nvPicPr>
+        <p:blipFill>
+          <a:blip r:embed="rId2"/>
+          <a:stretch>
+            <a:fillRect/>
+          </a:stretch>
+        </p:blipFill>
+        <p:spPr>
+          <a:xfrm>
+            <a:off x="2861076" y="5426350"/>
+            <a:ext cx="974921" cy="1371600"/>
+          </a:xfrm>
+          <a:prstGeom prst="rect">
+            <a:avLst/>
+          </a:prstGeom>
+        </p:spPr>
+      </p:pic>
+      <p:pic>
+        <p:nvPicPr>
+          <p:cNvPr id="54" name="Picture 53" descr="A grey rectangular object with a black border&#10;&#10;Description automatically generated">
+            <a:extLst>
+              <a:ext uri="{FF2B5EF4-FFF2-40B4-BE49-F238E27FC236}">
+                <a16:creationId xmlns:a16="http://schemas.microsoft.com/office/drawing/2014/main" id="{67833680-26F1-8306-E4CC-1080F4E0556C}"/>
+              </a:ext>
+            </a:extLst>
+          </p:cNvPr>
+          <p:cNvPicPr>
+            <a:picLocks noChangeAspect="1"/>
+          </p:cNvPicPr>
+          <p:nvPr/>
+        </p:nvPicPr>
+        <p:blipFill>
+          <a:blip r:embed="rId2"/>
+          <a:stretch>
+            <a:fillRect/>
+          </a:stretch>
+        </p:blipFill>
+        <p:spPr>
+          <a:xfrm>
+            <a:off x="3838225" y="5426350"/>
+            <a:ext cx="974921" cy="1371600"/>
+          </a:xfrm>
+          <a:prstGeom prst="rect">
+            <a:avLst/>
+          </a:prstGeom>
+        </p:spPr>
+      </p:pic>
+      <p:pic>
+        <p:nvPicPr>
+          <p:cNvPr id="55" name="Picture 54" descr="A grey rectangular object with a black border&#10;&#10;Description automatically generated">
+            <a:extLst>
+              <a:ext uri="{FF2B5EF4-FFF2-40B4-BE49-F238E27FC236}">
+                <a16:creationId xmlns:a16="http://schemas.microsoft.com/office/drawing/2014/main" id="{9C494D16-3414-4431-2951-796A92CF87D9}"/>
+              </a:ext>
+            </a:extLst>
+          </p:cNvPr>
+          <p:cNvPicPr>
+            <a:picLocks noChangeAspect="1"/>
+          </p:cNvPicPr>
+          <p:nvPr/>
+        </p:nvPicPr>
+        <p:blipFill>
+          <a:blip r:embed="rId2"/>
+          <a:stretch>
+            <a:fillRect/>
+          </a:stretch>
+        </p:blipFill>
+        <p:spPr>
+          <a:xfrm>
+            <a:off x="4813148" y="5431661"/>
+            <a:ext cx="974921" cy="1371600"/>
+          </a:xfrm>
+          <a:prstGeom prst="rect">
+            <a:avLst/>
+          </a:prstGeom>
+        </p:spPr>
+      </p:pic>
+      <p:pic>
+        <p:nvPicPr>
+          <p:cNvPr id="56" name="Picture 55" descr="A grey rectangular object with a black border&#10;&#10;Description automatically generated">
+            <a:extLst>
+              <a:ext uri="{FF2B5EF4-FFF2-40B4-BE49-F238E27FC236}">
+                <a16:creationId xmlns:a16="http://schemas.microsoft.com/office/drawing/2014/main" id="{4E9640A6-A207-9929-D3AE-0DFBA49D66C6}"/>
+              </a:ext>
+            </a:extLst>
+          </p:cNvPr>
+          <p:cNvPicPr>
+            <a:picLocks noChangeAspect="1"/>
+          </p:cNvPicPr>
+          <p:nvPr/>
+        </p:nvPicPr>
+        <p:blipFill>
+          <a:blip r:embed="rId2"/>
+          <a:stretch>
+            <a:fillRect/>
+          </a:stretch>
+        </p:blipFill>
+        <p:spPr>
+          <a:xfrm>
+            <a:off x="5790299" y="5436972"/>
+            <a:ext cx="974921" cy="1371600"/>
+          </a:xfrm>
+          <a:prstGeom prst="rect">
+            <a:avLst/>
+          </a:prstGeom>
+        </p:spPr>
+      </p:pic>
+      <p:pic>
+        <p:nvPicPr>
+          <p:cNvPr id="57" name="Picture 56" descr="A grey rectangular object with a black border&#10;&#10;Description automatically generated">
+            <a:extLst>
+              <a:ext uri="{FF2B5EF4-FFF2-40B4-BE49-F238E27FC236}">
+                <a16:creationId xmlns:a16="http://schemas.microsoft.com/office/drawing/2014/main" id="{2FCFEDF3-10AB-2F3F-1F77-AF8B5291239C}"/>
+              </a:ext>
+            </a:extLst>
+          </p:cNvPr>
+          <p:cNvPicPr>
+            <a:picLocks noChangeAspect="1"/>
+          </p:cNvPicPr>
+          <p:nvPr/>
+        </p:nvPicPr>
+        <p:blipFill>
+          <a:blip r:embed="rId2"/>
+          <a:stretch>
+            <a:fillRect/>
+          </a:stretch>
+        </p:blipFill>
+        <p:spPr>
+          <a:xfrm>
+            <a:off x="9712039" y="5436972"/>
+            <a:ext cx="974921" cy="1371600"/>
+          </a:xfrm>
+          <a:prstGeom prst="rect">
+            <a:avLst/>
+          </a:prstGeom>
+        </p:spPr>
+      </p:pic>
+      <p:pic>
+        <p:nvPicPr>
+          <p:cNvPr id="59" name="Picture 58" descr="A grey rectangular object with a black border&#10;&#10;Description automatically generated">
+            <a:extLst>
+              <a:ext uri="{FF2B5EF4-FFF2-40B4-BE49-F238E27FC236}">
+                <a16:creationId xmlns:a16="http://schemas.microsoft.com/office/drawing/2014/main" id="{CBC2AF91-5564-751E-1A8C-D57D9BA97B79}"/>
+              </a:ext>
+            </a:extLst>
+          </p:cNvPr>
+          <p:cNvPicPr>
+            <a:picLocks noChangeAspect="1"/>
+          </p:cNvPicPr>
+          <p:nvPr/>
+        </p:nvPicPr>
+        <p:blipFill>
+          <a:blip r:embed="rId2"/>
+          <a:stretch>
+            <a:fillRect/>
+          </a:stretch>
+        </p:blipFill>
+        <p:spPr>
+          <a:xfrm>
+            <a:off x="7740143" y="5436972"/>
+            <a:ext cx="974921" cy="1371600"/>
+          </a:xfrm>
+          <a:prstGeom prst="rect">
+            <a:avLst/>
+          </a:prstGeom>
+        </p:spPr>
+      </p:pic>
+      <p:pic>
+        <p:nvPicPr>
+          <p:cNvPr id="60" name="Picture 59" descr="A grey rectangular object with a black border&#10;&#10;Description automatically generated">
+            <a:extLst>
+              <a:ext uri="{FF2B5EF4-FFF2-40B4-BE49-F238E27FC236}">
+                <a16:creationId xmlns:a16="http://schemas.microsoft.com/office/drawing/2014/main" id="{BC0D1995-5756-8B3D-09E2-E5FB57493407}"/>
+              </a:ext>
+            </a:extLst>
+          </p:cNvPr>
+          <p:cNvPicPr>
+            <a:picLocks noChangeAspect="1"/>
+          </p:cNvPicPr>
+          <p:nvPr/>
+        </p:nvPicPr>
+        <p:blipFill>
+          <a:blip r:embed="rId2"/>
+          <a:stretch>
+            <a:fillRect/>
+          </a:stretch>
+        </p:blipFill>
+        <p:spPr>
+          <a:xfrm>
+            <a:off x="8726091" y="5436972"/>
+            <a:ext cx="974921" cy="1371600"/>
+          </a:xfrm>
+          <a:prstGeom prst="rect">
+            <a:avLst/>
+          </a:prstGeom>
+        </p:spPr>
+      </p:pic>
+      <p:grpSp>
+        <p:nvGrpSpPr>
+          <p:cNvPr id="11" name="Group 10">
+            <a:extLst>
+              <a:ext uri="{FF2B5EF4-FFF2-40B4-BE49-F238E27FC236}">
+                <a16:creationId xmlns:a16="http://schemas.microsoft.com/office/drawing/2014/main" id="{66BBAA13-1A1F-07FE-CD63-2813E1F400F3}"/>
+              </a:ext>
+            </a:extLst>
+          </p:cNvPr>
+          <p:cNvGrpSpPr/>
+          <p:nvPr/>
+        </p:nvGrpSpPr>
+        <p:grpSpPr>
+          <a:xfrm>
+            <a:off x="2850049" y="1392630"/>
+            <a:ext cx="4884581" cy="5419412"/>
+            <a:chOff x="2850049" y="1392630"/>
+            <a:chExt cx="4884581" cy="5419412"/>
+          </a:xfrm>
+        </p:grpSpPr>
+        <p:pic>
+          <p:nvPicPr>
+            <p:cNvPr id="2" name="Picture 1" descr="A screen shot of a phone&#10;&#10;Description automatically generated">
+              <a:extLst>
+                <a:ext uri="{FF2B5EF4-FFF2-40B4-BE49-F238E27FC236}">
+                  <a16:creationId xmlns:a16="http://schemas.microsoft.com/office/drawing/2014/main" id="{3FB30B98-3593-AD3B-7122-3A65C853E7CA}"/>
+                </a:ext>
+              </a:extLst>
+            </p:cNvPr>
+            <p:cNvPicPr>
+              <a:picLocks noChangeAspect="1"/>
+            </p:cNvPicPr>
+            <p:nvPr/>
+          </p:nvPicPr>
+          <p:blipFill>
+            <a:blip r:embed="rId3"/>
+            <a:stretch>
+              <a:fillRect/>
+            </a:stretch>
+          </p:blipFill>
+          <p:spPr>
+            <a:xfrm>
+              <a:off x="2850049" y="1392630"/>
+              <a:ext cx="974922" cy="1371600"/>
+            </a:xfrm>
+            <a:prstGeom prst="rect">
+              <a:avLst/>
+            </a:prstGeom>
+          </p:spPr>
+        </p:pic>
+        <p:pic>
+          <p:nvPicPr>
+            <p:cNvPr id="10" name="Picture 9" descr="A screen shot of a phone&#10;&#10;Description automatically generated">
+              <a:extLst>
+                <a:ext uri="{FF2B5EF4-FFF2-40B4-BE49-F238E27FC236}">
+                  <a16:creationId xmlns:a16="http://schemas.microsoft.com/office/drawing/2014/main" id="{9F1A82D3-912A-3958-03A7-9F4C71539038}"/>
+                </a:ext>
+              </a:extLst>
+            </p:cNvPr>
+            <p:cNvPicPr>
+              <a:picLocks noChangeAspect="1"/>
+            </p:cNvPicPr>
+            <p:nvPr/>
+          </p:nvPicPr>
+          <p:blipFill>
+            <a:blip r:embed="rId3"/>
+            <a:stretch>
+              <a:fillRect/>
+            </a:stretch>
+          </p:blipFill>
+          <p:spPr>
+            <a:xfrm>
+              <a:off x="6759708" y="5440442"/>
+              <a:ext cx="974922" cy="1371600"/>
+            </a:xfrm>
+            <a:prstGeom prst="rect">
+              <a:avLst/>
+            </a:prstGeom>
+          </p:spPr>
+        </p:pic>
+        <p:pic>
+          <p:nvPicPr>
+            <p:cNvPr id="3" name="Picture 2" descr="A screen shot of a phone&#10;&#10;Description automatically generated">
+              <a:extLst>
+                <a:ext uri="{FF2B5EF4-FFF2-40B4-BE49-F238E27FC236}">
+                  <a16:creationId xmlns:a16="http://schemas.microsoft.com/office/drawing/2014/main" id="{9357361A-77C5-A2B8-858A-5B0F4E5A9EAC}"/>
+                </a:ext>
+              </a:extLst>
+            </p:cNvPr>
+            <p:cNvPicPr>
+              <a:picLocks noChangeAspect="1"/>
+            </p:cNvPicPr>
+            <p:nvPr/>
+          </p:nvPicPr>
+          <p:blipFill>
+            <a:blip r:embed="rId3"/>
+            <a:stretch>
+              <a:fillRect/>
+            </a:stretch>
+          </p:blipFill>
+          <p:spPr>
+            <a:xfrm>
+              <a:off x="5779272" y="2780163"/>
+              <a:ext cx="974922" cy="1371600"/>
+            </a:xfrm>
+            <a:prstGeom prst="rect">
+              <a:avLst/>
+            </a:prstGeom>
+          </p:spPr>
+        </p:pic>
+      </p:grpSp>
+    </p:spTree>
+    <p:extLst>
+      <p:ext uri="{BB962C8B-B14F-4D97-AF65-F5344CB8AC3E}">
+        <p14:creationId xmlns:p14="http://schemas.microsoft.com/office/powerpoint/2010/main" val="3257920367"/>
+      </p:ext>
+    </p:extLst>
+  </p:cSld>
+  <p:clrMapOvr>
+    <a:masterClrMapping/>
+  </p:clrMapOvr>
+  <mc:AlternateContent xmlns:mc="http://schemas.openxmlformats.org/markup-compatibility/2006" xmlns:p159="http://schemas.microsoft.com/office/powerpoint/2015/09/main">
+    <mc:Choice Requires="p159">
+      <p:transition xmlns:p14="http://schemas.microsoft.com/office/powerpoint/2010/main" spd="slow" p14:dur="2000">
+        <p159:morph option="byObject"/>
+      </p:transition>
+    </mc:Choice>
+    <mc:Fallback xmlns="">
       <p:transition spd="slow">
         <p:fade/>
       </p:transition>
@@ -19651,13 +24404,13 @@
   <p:clrMapOvr>
     <a:masterClrMapping/>
   </p:clrMapOvr>
-  <mc:AlternateContent xmlns:mc="http://schemas.openxmlformats.org/markup-compatibility/2006">
-    <mc:Choice xmlns:p159="http://schemas.microsoft.com/office/powerpoint/2015/09/main" Requires="p159">
+  <mc:AlternateContent xmlns:mc="http://schemas.openxmlformats.org/markup-compatibility/2006" xmlns:p159="http://schemas.microsoft.com/office/powerpoint/2015/09/main">
+    <mc:Choice Requires="p159">
       <p:transition xmlns:p14="http://schemas.microsoft.com/office/powerpoint/2010/main" spd="slow" p14:dur="2000">
         <p159:morph option="byObject"/>
       </p:transition>
     </mc:Choice>
-    <mc:Fallback>
+    <mc:Fallback xmlns="">
       <p:transition spd="slow">
         <p:fade/>
       </p:transition>
